--- a/slides/CSC336-Lecture-12-Array-Methods-and-Processing.pptx
+++ b/slides/CSC336-Lecture-12-Array-Methods-and-Processing.pptx
@@ -3014,79 +3014,44 @@
       </p:sp>
       <p:sp>
         <p:nvSpPr>
-          <p:cNvPr id="6" name="Text 4"/>
+          <p:cNvPr id="8" name="cuinotes-footer-mark"/>
           <p:cNvSpPr txBox="1"/>
           <p:nvPr/>
         </p:nvSpPr>
         <p:spPr>
           <a:xfrm>
-            <a:off x="640080" y="6446520"/>
-            <a:ext cx="8686800" cy="292608"/>
-          </a:xfrm>
-          <a:prstGeom prst="rect">
-            <a:avLst/>
-          </a:prstGeom>
-          <a:noFill/>
-          <a:ln/>
-        </p:spPr>
-        <p:txBody>
-          <a:bodyPr wrap="square" lIns="0" tIns="0" rIns="0" bIns="0" rtlCol="0" anchor="ctr"/>
-          <a:lstStyle/>
-          <a:p>
-            <a:pPr algn="l" indent="0" marL="0">
-              <a:buNone/>
-            </a:pPr>
-            <a:r>
-              <a:rPr lang="en-US" sz="900" dirty="0">
-                <a:solidFill>
-                  <a:srgbClr val="9AA3D8"/>
-                </a:solidFill>
-                <a:latin typeface="Calibri" pitchFamily="34" charset="0"/>
-                <a:ea typeface="Calibri" pitchFamily="34" charset="-122"/>
-                <a:cs typeface="Calibri" pitchFamily="34" charset="-120"/>
-              </a:rPr>
-              <a:t>Usman Akram  •  COMSATS University Islamabad</a:t>
-            </a:r>
-            <a:endParaRPr lang="en-US" sz="900" dirty="0"/>
-          </a:p>
-        </p:txBody>
-      </p:sp>
-      <p:sp>
-        <p:nvSpPr>
-          <p:cNvPr id="7" name="Text 5"/>
-          <p:cNvSpPr txBox="1"/>
-          <p:nvPr/>
-        </p:nvSpPr>
-        <p:spPr>
-          <a:xfrm>
-            <a:off x="11155680" y="6446520"/>
-            <a:ext cx="457200" cy="292608"/>
-          </a:xfrm>
-          <a:prstGeom prst="rect">
-            <a:avLst/>
-          </a:prstGeom>
-          <a:noFill/>
-          <a:ln/>
-        </p:spPr>
-        <p:txBody>
-          <a:bodyPr wrap="square" lIns="0" tIns="0" rIns="0" bIns="0" rtlCol="0" anchor="ctr"/>
-          <a:lstStyle/>
-          <a:p>
-            <a:pPr algn="r" indent="0" marL="0">
-              <a:buNone/>
-            </a:pPr>
-            <a:r>
-              <a:rPr lang="en-US" sz="900" dirty="0">
-                <a:solidFill>
-                  <a:srgbClr val="9AA3D8"/>
-                </a:solidFill>
-                <a:latin typeface="Calibri" pitchFamily="34" charset="0"/>
-                <a:ea typeface="Calibri" pitchFamily="34" charset="-122"/>
-                <a:cs typeface="Calibri" pitchFamily="34" charset="-120"/>
-              </a:rPr>
-              <a:t>1</a:t>
-            </a:r>
-            <a:endParaRPr lang="en-US" sz="900" dirty="0"/>
+            <a:off x="9951720" y="6455664"/>
+            <a:ext cx="2011680" cy="292608"/>
+          </a:xfrm>
+          <a:prstGeom prst="rect">
+            <a:avLst/>
+          </a:prstGeom>
+          <a:noFill/>
+        </p:spPr>
+        <p:txBody>
+          <a:bodyPr wrap="none" lIns="0" rIns="0" tIns="0" bIns="0">
+            <a:spAutoFit/>
+          </a:bodyPr>
+          <a:lstStyle/>
+          <a:p>
+            <a:pPr algn="r"/>
+            <a:r>
+              <a:rPr sz="1000">
+                <a:solidFill>
+                  <a:srgbClr val="8A939B"/>
+                </a:solidFill>
+                <a:hlinkClick r:id="rId3"/>
+              </a:rPr>
+              <a:t>cuinotes.com</a:t>
+            </a:r>
+            <a:r>
+              <a:rPr sz="1000">
+                <a:solidFill>
+                  <a:srgbClr val="8A939B"/>
+                </a:solidFill>
+              </a:rPr>
+              <a:t>  ·  1</a:t>
+            </a:r>
           </a:p>
         </p:txBody>
       </p:sp>
@@ -3221,6 +3186,10 @@
           </a:solidFill>
           <a:ln/>
         </p:spPr>
+        <p:txBody>
+          <a:bodyPr/>
+          <a:p/>
+        </p:txBody>
       </p:sp>
       <p:sp>
         <p:nvSpPr>
@@ -3405,79 +3374,44 @@
       </p:sp>
       <p:sp>
         <p:nvSpPr>
-          <p:cNvPr id="7" name="Text 5"/>
+          <p:cNvPr id="9" name="cuinotes-footer-mark"/>
           <p:cNvSpPr txBox="1"/>
           <p:nvPr/>
         </p:nvSpPr>
         <p:spPr>
           <a:xfrm>
-            <a:off x="640080" y="6446520"/>
-            <a:ext cx="8686800" cy="292608"/>
-          </a:xfrm>
-          <a:prstGeom prst="rect">
-            <a:avLst/>
-          </a:prstGeom>
-          <a:noFill/>
-          <a:ln/>
-        </p:spPr>
-        <p:txBody>
-          <a:bodyPr wrap="square" lIns="0" tIns="0" rIns="0" bIns="0" rtlCol="0" anchor="ctr"/>
-          <a:lstStyle/>
-          <a:p>
-            <a:pPr algn="l" indent="0" marL="0">
-              <a:buNone/>
-            </a:pPr>
-            <a:r>
-              <a:rPr lang="en-US" sz="900" dirty="0">
-                <a:solidFill>
-                  <a:srgbClr val="5D5D72"/>
-                </a:solidFill>
-                <a:latin typeface="Calibri" pitchFamily="34" charset="0"/>
-                <a:ea typeface="Calibri" pitchFamily="34" charset="-122"/>
-                <a:cs typeface="Calibri" pitchFamily="34" charset="-120"/>
-              </a:rPr>
-              <a:t>Usman Akram  •  COMSATS University Islamabad</a:t>
-            </a:r>
-            <a:endParaRPr lang="en-US" sz="900" dirty="0"/>
-          </a:p>
-        </p:txBody>
-      </p:sp>
-      <p:sp>
-        <p:nvSpPr>
-          <p:cNvPr id="8" name="Text 6"/>
-          <p:cNvSpPr txBox="1"/>
-          <p:nvPr/>
-        </p:nvSpPr>
-        <p:spPr>
-          <a:xfrm>
-            <a:off x="11155680" y="6446520"/>
-            <a:ext cx="457200" cy="292608"/>
-          </a:xfrm>
-          <a:prstGeom prst="rect">
-            <a:avLst/>
-          </a:prstGeom>
-          <a:noFill/>
-          <a:ln/>
-        </p:spPr>
-        <p:txBody>
-          <a:bodyPr wrap="square" lIns="0" tIns="0" rIns="0" bIns="0" rtlCol="0" anchor="ctr"/>
-          <a:lstStyle/>
-          <a:p>
-            <a:pPr algn="r" indent="0" marL="0">
-              <a:buNone/>
-            </a:pPr>
-            <a:r>
-              <a:rPr lang="en-US" sz="900" dirty="0">
-                <a:solidFill>
-                  <a:srgbClr val="5D5D72"/>
-                </a:solidFill>
-                <a:latin typeface="Calibri" pitchFamily="34" charset="0"/>
-                <a:ea typeface="Calibri" pitchFamily="34" charset="-122"/>
-                <a:cs typeface="Calibri" pitchFamily="34" charset="-120"/>
-              </a:rPr>
-              <a:t>10</a:t>
-            </a:r>
-            <a:endParaRPr lang="en-US" sz="900" dirty="0"/>
+            <a:off x="9951720" y="6455664"/>
+            <a:ext cx="2011680" cy="292608"/>
+          </a:xfrm>
+          <a:prstGeom prst="rect">
+            <a:avLst/>
+          </a:prstGeom>
+          <a:noFill/>
+        </p:spPr>
+        <p:txBody>
+          <a:bodyPr wrap="none" lIns="0" rIns="0" tIns="0" bIns="0">
+            <a:spAutoFit/>
+          </a:bodyPr>
+          <a:lstStyle/>
+          <a:p>
+            <a:pPr algn="r"/>
+            <a:r>
+              <a:rPr sz="1000">
+                <a:solidFill>
+                  <a:srgbClr val="8A939B"/>
+                </a:solidFill>
+                <a:hlinkClick r:id="rId3"/>
+              </a:rPr>
+              <a:t>cuinotes.com</a:t>
+            </a:r>
+            <a:r>
+              <a:rPr sz="1000">
+                <a:solidFill>
+                  <a:srgbClr val="8A939B"/>
+                </a:solidFill>
+              </a:rPr>
+              <a:t>  ·  10</a:t>
+            </a:r>
           </a:p>
         </p:txBody>
       </p:sp>
@@ -3612,6 +3546,10 @@
           </a:solidFill>
           <a:ln/>
         </p:spPr>
+        <p:txBody>
+          <a:bodyPr/>
+          <a:p/>
+        </p:txBody>
       </p:sp>
       <p:sp>
         <p:nvSpPr>
@@ -3845,79 +3783,44 @@
       </p:sp>
       <p:sp>
         <p:nvSpPr>
-          <p:cNvPr id="7" name="Text 5"/>
+          <p:cNvPr id="9" name="cuinotes-footer-mark"/>
           <p:cNvSpPr txBox="1"/>
           <p:nvPr/>
         </p:nvSpPr>
         <p:spPr>
           <a:xfrm>
-            <a:off x="640080" y="6446520"/>
-            <a:ext cx="8686800" cy="292608"/>
-          </a:xfrm>
-          <a:prstGeom prst="rect">
-            <a:avLst/>
-          </a:prstGeom>
-          <a:noFill/>
-          <a:ln/>
-        </p:spPr>
-        <p:txBody>
-          <a:bodyPr wrap="square" lIns="0" tIns="0" rIns="0" bIns="0" rtlCol="0" anchor="ctr"/>
-          <a:lstStyle/>
-          <a:p>
-            <a:pPr algn="l" indent="0" marL="0">
-              <a:buNone/>
-            </a:pPr>
-            <a:r>
-              <a:rPr lang="en-US" sz="900" dirty="0">
-                <a:solidFill>
-                  <a:srgbClr val="5D5D72"/>
-                </a:solidFill>
-                <a:latin typeface="Calibri" pitchFamily="34" charset="0"/>
-                <a:ea typeface="Calibri" pitchFamily="34" charset="-122"/>
-                <a:cs typeface="Calibri" pitchFamily="34" charset="-120"/>
-              </a:rPr>
-              <a:t>Usman Akram  •  COMSATS University Islamabad</a:t>
-            </a:r>
-            <a:endParaRPr lang="en-US" sz="900" dirty="0"/>
-          </a:p>
-        </p:txBody>
-      </p:sp>
-      <p:sp>
-        <p:nvSpPr>
-          <p:cNvPr id="8" name="Text 6"/>
-          <p:cNvSpPr txBox="1"/>
-          <p:nvPr/>
-        </p:nvSpPr>
-        <p:spPr>
-          <a:xfrm>
-            <a:off x="11155680" y="6446520"/>
-            <a:ext cx="457200" cy="292608"/>
-          </a:xfrm>
-          <a:prstGeom prst="rect">
-            <a:avLst/>
-          </a:prstGeom>
-          <a:noFill/>
-          <a:ln/>
-        </p:spPr>
-        <p:txBody>
-          <a:bodyPr wrap="square" lIns="0" tIns="0" rIns="0" bIns="0" rtlCol="0" anchor="ctr"/>
-          <a:lstStyle/>
-          <a:p>
-            <a:pPr algn="r" indent="0" marL="0">
-              <a:buNone/>
-            </a:pPr>
-            <a:r>
-              <a:rPr lang="en-US" sz="900" dirty="0">
-                <a:solidFill>
-                  <a:srgbClr val="5D5D72"/>
-                </a:solidFill>
-                <a:latin typeface="Calibri" pitchFamily="34" charset="0"/>
-                <a:ea typeface="Calibri" pitchFamily="34" charset="-122"/>
-                <a:cs typeface="Calibri" pitchFamily="34" charset="-120"/>
-              </a:rPr>
-              <a:t>11</a:t>
-            </a:r>
-            <a:endParaRPr lang="en-US" sz="900" dirty="0"/>
+            <a:off x="9951720" y="6455664"/>
+            <a:ext cx="2011680" cy="292608"/>
+          </a:xfrm>
+          <a:prstGeom prst="rect">
+            <a:avLst/>
+          </a:prstGeom>
+          <a:noFill/>
+        </p:spPr>
+        <p:txBody>
+          <a:bodyPr wrap="none" lIns="0" rIns="0" tIns="0" bIns="0">
+            <a:spAutoFit/>
+          </a:bodyPr>
+          <a:lstStyle/>
+          <a:p>
+            <a:pPr algn="r"/>
+            <a:r>
+              <a:rPr sz="1000">
+                <a:solidFill>
+                  <a:srgbClr val="8A939B"/>
+                </a:solidFill>
+                <a:hlinkClick r:id="rId3"/>
+              </a:rPr>
+              <a:t>cuinotes.com</a:t>
+            </a:r>
+            <a:r>
+              <a:rPr sz="1000">
+                <a:solidFill>
+                  <a:srgbClr val="8A939B"/>
+                </a:solidFill>
+              </a:rPr>
+              <a:t>  ·  11</a:t>
+            </a:r>
           </a:p>
         </p:txBody>
       </p:sp>
@@ -4052,6 +3955,10 @@
           </a:solidFill>
           <a:ln/>
         </p:spPr>
+        <p:txBody>
+          <a:bodyPr/>
+          <a:p/>
+        </p:txBody>
       </p:sp>
       <p:sp>
         <p:nvSpPr>
@@ -4196,79 +4103,44 @@
       </p:sp>
       <p:sp>
         <p:nvSpPr>
-          <p:cNvPr id="7" name="Text 5"/>
+          <p:cNvPr id="9" name="cuinotes-footer-mark"/>
           <p:cNvSpPr txBox="1"/>
           <p:nvPr/>
         </p:nvSpPr>
         <p:spPr>
           <a:xfrm>
-            <a:off x="640080" y="6446520"/>
-            <a:ext cx="8686800" cy="292608"/>
-          </a:xfrm>
-          <a:prstGeom prst="rect">
-            <a:avLst/>
-          </a:prstGeom>
-          <a:noFill/>
-          <a:ln/>
-        </p:spPr>
-        <p:txBody>
-          <a:bodyPr wrap="square" lIns="0" tIns="0" rIns="0" bIns="0" rtlCol="0" anchor="ctr"/>
-          <a:lstStyle/>
-          <a:p>
-            <a:pPr algn="l" indent="0" marL="0">
-              <a:buNone/>
-            </a:pPr>
-            <a:r>
-              <a:rPr lang="en-US" sz="900" dirty="0">
-                <a:solidFill>
-                  <a:srgbClr val="5D5D72"/>
-                </a:solidFill>
-                <a:latin typeface="Calibri" pitchFamily="34" charset="0"/>
-                <a:ea typeface="Calibri" pitchFamily="34" charset="-122"/>
-                <a:cs typeface="Calibri" pitchFamily="34" charset="-120"/>
-              </a:rPr>
-              <a:t>Usman Akram  •  COMSATS University Islamabad</a:t>
-            </a:r>
-            <a:endParaRPr lang="en-US" sz="900" dirty="0"/>
-          </a:p>
-        </p:txBody>
-      </p:sp>
-      <p:sp>
-        <p:nvSpPr>
-          <p:cNvPr id="8" name="Text 6"/>
-          <p:cNvSpPr txBox="1"/>
-          <p:nvPr/>
-        </p:nvSpPr>
-        <p:spPr>
-          <a:xfrm>
-            <a:off x="11155680" y="6446520"/>
-            <a:ext cx="457200" cy="292608"/>
-          </a:xfrm>
-          <a:prstGeom prst="rect">
-            <a:avLst/>
-          </a:prstGeom>
-          <a:noFill/>
-          <a:ln/>
-        </p:spPr>
-        <p:txBody>
-          <a:bodyPr wrap="square" lIns="0" tIns="0" rIns="0" bIns="0" rtlCol="0" anchor="ctr"/>
-          <a:lstStyle/>
-          <a:p>
-            <a:pPr algn="r" indent="0" marL="0">
-              <a:buNone/>
-            </a:pPr>
-            <a:r>
-              <a:rPr lang="en-US" sz="900" dirty="0">
-                <a:solidFill>
-                  <a:srgbClr val="5D5D72"/>
-                </a:solidFill>
-                <a:latin typeface="Calibri" pitchFamily="34" charset="0"/>
-                <a:ea typeface="Calibri" pitchFamily="34" charset="-122"/>
-                <a:cs typeface="Calibri" pitchFamily="34" charset="-120"/>
-              </a:rPr>
-              <a:t>12</a:t>
-            </a:r>
-            <a:endParaRPr lang="en-US" sz="900" dirty="0"/>
+            <a:off x="9951720" y="6455664"/>
+            <a:ext cx="2011680" cy="292608"/>
+          </a:xfrm>
+          <a:prstGeom prst="rect">
+            <a:avLst/>
+          </a:prstGeom>
+          <a:noFill/>
+        </p:spPr>
+        <p:txBody>
+          <a:bodyPr wrap="none" lIns="0" rIns="0" tIns="0" bIns="0">
+            <a:spAutoFit/>
+          </a:bodyPr>
+          <a:lstStyle/>
+          <a:p>
+            <a:pPr algn="r"/>
+            <a:r>
+              <a:rPr sz="1000">
+                <a:solidFill>
+                  <a:srgbClr val="8A939B"/>
+                </a:solidFill>
+                <a:hlinkClick r:id="rId3"/>
+              </a:rPr>
+              <a:t>cuinotes.com</a:t>
+            </a:r>
+            <a:r>
+              <a:rPr sz="1000">
+                <a:solidFill>
+                  <a:srgbClr val="8A939B"/>
+                </a:solidFill>
+              </a:rPr>
+              <a:t>  ·  12</a:t>
+            </a:r>
           </a:p>
         </p:txBody>
       </p:sp>
@@ -4408,6 +4280,10 @@
             <a:prstDash val="solid"/>
           </a:ln>
         </p:spPr>
+        <p:txBody>
+          <a:bodyPr/>
+          <a:p/>
+        </p:txBody>
       </p:sp>
       <p:sp>
         <p:nvSpPr>
@@ -4489,79 +4365,44 @@
       </p:sp>
       <p:sp>
         <p:nvSpPr>
-          <p:cNvPr id="7" name="Text 5"/>
+          <p:cNvPr id="9" name="cuinotes-footer-mark"/>
           <p:cNvSpPr txBox="1"/>
           <p:nvPr/>
         </p:nvSpPr>
         <p:spPr>
           <a:xfrm>
-            <a:off x="640080" y="6446520"/>
-            <a:ext cx="8686800" cy="292608"/>
-          </a:xfrm>
-          <a:prstGeom prst="rect">
-            <a:avLst/>
-          </a:prstGeom>
-          <a:noFill/>
-          <a:ln/>
-        </p:spPr>
-        <p:txBody>
-          <a:bodyPr wrap="square" lIns="0" tIns="0" rIns="0" bIns="0" rtlCol="0" anchor="ctr"/>
-          <a:lstStyle/>
-          <a:p>
-            <a:pPr algn="l" indent="0" marL="0">
-              <a:buNone/>
-            </a:pPr>
-            <a:r>
-              <a:rPr lang="en-US" sz="900" dirty="0">
-                <a:solidFill>
-                  <a:srgbClr val="5D5D72"/>
-                </a:solidFill>
-                <a:latin typeface="Calibri" pitchFamily="34" charset="0"/>
-                <a:ea typeface="Calibri" pitchFamily="34" charset="-122"/>
-                <a:cs typeface="Calibri" pitchFamily="34" charset="-120"/>
-              </a:rPr>
-              <a:t>Usman Akram  •  COMSATS University Islamabad</a:t>
-            </a:r>
-            <a:endParaRPr lang="en-US" sz="900" dirty="0"/>
-          </a:p>
-        </p:txBody>
-      </p:sp>
-      <p:sp>
-        <p:nvSpPr>
-          <p:cNvPr id="8" name="Text 6"/>
-          <p:cNvSpPr txBox="1"/>
-          <p:nvPr/>
-        </p:nvSpPr>
-        <p:spPr>
-          <a:xfrm>
-            <a:off x="11155680" y="6446520"/>
-            <a:ext cx="457200" cy="292608"/>
-          </a:xfrm>
-          <a:prstGeom prst="rect">
-            <a:avLst/>
-          </a:prstGeom>
-          <a:noFill/>
-          <a:ln/>
-        </p:spPr>
-        <p:txBody>
-          <a:bodyPr wrap="square" lIns="0" tIns="0" rIns="0" bIns="0" rtlCol="0" anchor="ctr"/>
-          <a:lstStyle/>
-          <a:p>
-            <a:pPr algn="r" indent="0" marL="0">
-              <a:buNone/>
-            </a:pPr>
-            <a:r>
-              <a:rPr lang="en-US" sz="900" dirty="0">
-                <a:solidFill>
-                  <a:srgbClr val="5D5D72"/>
-                </a:solidFill>
-                <a:latin typeface="Calibri" pitchFamily="34" charset="0"/>
-                <a:ea typeface="Calibri" pitchFamily="34" charset="-122"/>
-                <a:cs typeface="Calibri" pitchFamily="34" charset="-120"/>
-              </a:rPr>
-              <a:t>13</a:t>
-            </a:r>
-            <a:endParaRPr lang="en-US" sz="900" dirty="0"/>
+            <a:off x="9951720" y="6455664"/>
+            <a:ext cx="2011680" cy="292608"/>
+          </a:xfrm>
+          <a:prstGeom prst="rect">
+            <a:avLst/>
+          </a:prstGeom>
+          <a:noFill/>
+        </p:spPr>
+        <p:txBody>
+          <a:bodyPr wrap="none" lIns="0" rIns="0" tIns="0" bIns="0">
+            <a:spAutoFit/>
+          </a:bodyPr>
+          <a:lstStyle/>
+          <a:p>
+            <a:pPr algn="r"/>
+            <a:r>
+              <a:rPr sz="1000">
+                <a:solidFill>
+                  <a:srgbClr val="8A939B"/>
+                </a:solidFill>
+                <a:hlinkClick r:id="rId3"/>
+              </a:rPr>
+              <a:t>cuinotes.com</a:t>
+            </a:r>
+            <a:r>
+              <a:rPr sz="1000">
+                <a:solidFill>
+                  <a:srgbClr val="8A939B"/>
+                </a:solidFill>
+              </a:rPr>
+              <a:t>  ·  13</a:t>
+            </a:r>
           </a:p>
         </p:txBody>
       </p:sp>
@@ -4696,6 +4537,10 @@
           </a:solidFill>
           <a:ln/>
         </p:spPr>
+        <p:txBody>
+          <a:bodyPr/>
+          <a:p/>
+        </p:txBody>
       </p:sp>
       <p:sp>
         <p:nvSpPr>
@@ -4861,79 +4706,44 @@
       </p:sp>
       <p:sp>
         <p:nvSpPr>
-          <p:cNvPr id="6" name="Text 4"/>
+          <p:cNvPr id="8" name="cuinotes-footer-mark"/>
           <p:cNvSpPr txBox="1"/>
           <p:nvPr/>
         </p:nvSpPr>
         <p:spPr>
           <a:xfrm>
-            <a:off x="640080" y="6446520"/>
-            <a:ext cx="8686800" cy="292608"/>
-          </a:xfrm>
-          <a:prstGeom prst="rect">
-            <a:avLst/>
-          </a:prstGeom>
-          <a:noFill/>
-          <a:ln/>
-        </p:spPr>
-        <p:txBody>
-          <a:bodyPr wrap="square" lIns="0" tIns="0" rIns="0" bIns="0" rtlCol="0" anchor="ctr"/>
-          <a:lstStyle/>
-          <a:p>
-            <a:pPr algn="l" indent="0" marL="0">
-              <a:buNone/>
-            </a:pPr>
-            <a:r>
-              <a:rPr lang="en-US" sz="900" dirty="0">
-                <a:solidFill>
-                  <a:srgbClr val="5D5D72"/>
-                </a:solidFill>
-                <a:latin typeface="Calibri" pitchFamily="34" charset="0"/>
-                <a:ea typeface="Calibri" pitchFamily="34" charset="-122"/>
-                <a:cs typeface="Calibri" pitchFamily="34" charset="-120"/>
-              </a:rPr>
-              <a:t>Usman Akram  •  COMSATS University Islamabad</a:t>
-            </a:r>
-            <a:endParaRPr lang="en-US" sz="900" dirty="0"/>
-          </a:p>
-        </p:txBody>
-      </p:sp>
-      <p:sp>
-        <p:nvSpPr>
-          <p:cNvPr id="7" name="Text 5"/>
-          <p:cNvSpPr txBox="1"/>
-          <p:nvPr/>
-        </p:nvSpPr>
-        <p:spPr>
-          <a:xfrm>
-            <a:off x="11155680" y="6446520"/>
-            <a:ext cx="457200" cy="292608"/>
-          </a:xfrm>
-          <a:prstGeom prst="rect">
-            <a:avLst/>
-          </a:prstGeom>
-          <a:noFill/>
-          <a:ln/>
-        </p:spPr>
-        <p:txBody>
-          <a:bodyPr wrap="square" lIns="0" tIns="0" rIns="0" bIns="0" rtlCol="0" anchor="ctr"/>
-          <a:lstStyle/>
-          <a:p>
-            <a:pPr algn="r" indent="0" marL="0">
-              <a:buNone/>
-            </a:pPr>
-            <a:r>
-              <a:rPr lang="en-US" sz="900" dirty="0">
-                <a:solidFill>
-                  <a:srgbClr val="5D5D72"/>
-                </a:solidFill>
-                <a:latin typeface="Calibri" pitchFamily="34" charset="0"/>
-                <a:ea typeface="Calibri" pitchFamily="34" charset="-122"/>
-                <a:cs typeface="Calibri" pitchFamily="34" charset="-120"/>
-              </a:rPr>
-              <a:t>14</a:t>
-            </a:r>
-            <a:endParaRPr lang="en-US" sz="900" dirty="0"/>
+            <a:off x="9951720" y="6455664"/>
+            <a:ext cx="2011680" cy="292608"/>
+          </a:xfrm>
+          <a:prstGeom prst="rect">
+            <a:avLst/>
+          </a:prstGeom>
+          <a:noFill/>
+        </p:spPr>
+        <p:txBody>
+          <a:bodyPr wrap="none" lIns="0" rIns="0" tIns="0" bIns="0">
+            <a:spAutoFit/>
+          </a:bodyPr>
+          <a:lstStyle/>
+          <a:p>
+            <a:pPr algn="r"/>
+            <a:r>
+              <a:rPr sz="1000">
+                <a:solidFill>
+                  <a:srgbClr val="8A939B"/>
+                </a:solidFill>
+                <a:hlinkClick r:id="rId3"/>
+              </a:rPr>
+              <a:t>cuinotes.com</a:t>
+            </a:r>
+            <a:r>
+              <a:rPr sz="1000">
+                <a:solidFill>
+                  <a:srgbClr val="8A939B"/>
+                </a:solidFill>
+              </a:rPr>
+              <a:t>  ·  14</a:t>
+            </a:r>
           </a:p>
         </p:txBody>
       </p:sp>
@@ -5068,6 +4878,10 @@
           </a:solidFill>
           <a:ln/>
         </p:spPr>
+        <p:txBody>
+          <a:bodyPr/>
+          <a:p/>
+        </p:txBody>
       </p:sp>
       <p:sp>
         <p:nvSpPr>
@@ -5222,79 +5036,44 @@
       </p:sp>
       <p:sp>
         <p:nvSpPr>
-          <p:cNvPr id="6" name="Text 4"/>
+          <p:cNvPr id="8" name="cuinotes-footer-mark"/>
           <p:cNvSpPr txBox="1"/>
           <p:nvPr/>
         </p:nvSpPr>
         <p:spPr>
           <a:xfrm>
-            <a:off x="640080" y="6446520"/>
-            <a:ext cx="8686800" cy="292608"/>
-          </a:xfrm>
-          <a:prstGeom prst="rect">
-            <a:avLst/>
-          </a:prstGeom>
-          <a:noFill/>
-          <a:ln/>
-        </p:spPr>
-        <p:txBody>
-          <a:bodyPr wrap="square" lIns="0" tIns="0" rIns="0" bIns="0" rtlCol="0" anchor="ctr"/>
-          <a:lstStyle/>
-          <a:p>
-            <a:pPr algn="l" indent="0" marL="0">
-              <a:buNone/>
-            </a:pPr>
-            <a:r>
-              <a:rPr lang="en-US" sz="900" dirty="0">
-                <a:solidFill>
-                  <a:srgbClr val="5D5D72"/>
-                </a:solidFill>
-                <a:latin typeface="Calibri" pitchFamily="34" charset="0"/>
-                <a:ea typeface="Calibri" pitchFamily="34" charset="-122"/>
-                <a:cs typeface="Calibri" pitchFamily="34" charset="-120"/>
-              </a:rPr>
-              <a:t>Usman Akram  •  COMSATS University Islamabad</a:t>
-            </a:r>
-            <a:endParaRPr lang="en-US" sz="900" dirty="0"/>
-          </a:p>
-        </p:txBody>
-      </p:sp>
-      <p:sp>
-        <p:nvSpPr>
-          <p:cNvPr id="7" name="Text 5"/>
-          <p:cNvSpPr txBox="1"/>
-          <p:nvPr/>
-        </p:nvSpPr>
-        <p:spPr>
-          <a:xfrm>
-            <a:off x="11155680" y="6446520"/>
-            <a:ext cx="457200" cy="292608"/>
-          </a:xfrm>
-          <a:prstGeom prst="rect">
-            <a:avLst/>
-          </a:prstGeom>
-          <a:noFill/>
-          <a:ln/>
-        </p:spPr>
-        <p:txBody>
-          <a:bodyPr wrap="square" lIns="0" tIns="0" rIns="0" bIns="0" rtlCol="0" anchor="ctr"/>
-          <a:lstStyle/>
-          <a:p>
-            <a:pPr algn="r" indent="0" marL="0">
-              <a:buNone/>
-            </a:pPr>
-            <a:r>
-              <a:rPr lang="en-US" sz="900" dirty="0">
-                <a:solidFill>
-                  <a:srgbClr val="5D5D72"/>
-                </a:solidFill>
-                <a:latin typeface="Calibri" pitchFamily="34" charset="0"/>
-                <a:ea typeface="Calibri" pitchFamily="34" charset="-122"/>
-                <a:cs typeface="Calibri" pitchFamily="34" charset="-120"/>
-              </a:rPr>
-              <a:t>15</a:t>
-            </a:r>
-            <a:endParaRPr lang="en-US" sz="900" dirty="0"/>
+            <a:off x="9951720" y="6455664"/>
+            <a:ext cx="2011680" cy="292608"/>
+          </a:xfrm>
+          <a:prstGeom prst="rect">
+            <a:avLst/>
+          </a:prstGeom>
+          <a:noFill/>
+        </p:spPr>
+        <p:txBody>
+          <a:bodyPr wrap="none" lIns="0" rIns="0" tIns="0" bIns="0">
+            <a:spAutoFit/>
+          </a:bodyPr>
+          <a:lstStyle/>
+          <a:p>
+            <a:pPr algn="r"/>
+            <a:r>
+              <a:rPr sz="1000">
+                <a:solidFill>
+                  <a:srgbClr val="8A939B"/>
+                </a:solidFill>
+                <a:hlinkClick r:id="rId3"/>
+              </a:rPr>
+              <a:t>cuinotes.com</a:t>
+            </a:r>
+            <a:r>
+              <a:rPr sz="1000">
+                <a:solidFill>
+                  <a:srgbClr val="8A939B"/>
+                </a:solidFill>
+              </a:rPr>
+              <a:t>  ·  15</a:t>
+            </a:r>
           </a:p>
         </p:txBody>
       </p:sp>
@@ -5429,6 +5208,10 @@
           </a:solidFill>
           <a:ln/>
         </p:spPr>
+        <p:txBody>
+          <a:bodyPr/>
+          <a:p/>
+        </p:txBody>
       </p:sp>
       <p:sp>
         <p:nvSpPr>
@@ -5682,79 +5465,44 @@
       </p:sp>
       <p:sp>
         <p:nvSpPr>
-          <p:cNvPr id="7" name="Text 5"/>
+          <p:cNvPr id="9" name="cuinotes-footer-mark"/>
           <p:cNvSpPr txBox="1"/>
           <p:nvPr/>
         </p:nvSpPr>
         <p:spPr>
           <a:xfrm>
-            <a:off x="640080" y="6446520"/>
-            <a:ext cx="8686800" cy="292608"/>
-          </a:xfrm>
-          <a:prstGeom prst="rect">
-            <a:avLst/>
-          </a:prstGeom>
-          <a:noFill/>
-          <a:ln/>
-        </p:spPr>
-        <p:txBody>
-          <a:bodyPr wrap="square" lIns="0" tIns="0" rIns="0" bIns="0" rtlCol="0" anchor="ctr"/>
-          <a:lstStyle/>
-          <a:p>
-            <a:pPr algn="l" indent="0" marL="0">
-              <a:buNone/>
-            </a:pPr>
-            <a:r>
-              <a:rPr lang="en-US" sz="900" dirty="0">
-                <a:solidFill>
-                  <a:srgbClr val="5D5D72"/>
-                </a:solidFill>
-                <a:latin typeface="Calibri" pitchFamily="34" charset="0"/>
-                <a:ea typeface="Calibri" pitchFamily="34" charset="-122"/>
-                <a:cs typeface="Calibri" pitchFamily="34" charset="-120"/>
-              </a:rPr>
-              <a:t>Usman Akram  •  COMSATS University Islamabad</a:t>
-            </a:r>
-            <a:endParaRPr lang="en-US" sz="900" dirty="0"/>
-          </a:p>
-        </p:txBody>
-      </p:sp>
-      <p:sp>
-        <p:nvSpPr>
-          <p:cNvPr id="8" name="Text 6"/>
-          <p:cNvSpPr txBox="1"/>
-          <p:nvPr/>
-        </p:nvSpPr>
-        <p:spPr>
-          <a:xfrm>
-            <a:off x="11155680" y="6446520"/>
-            <a:ext cx="457200" cy="292608"/>
-          </a:xfrm>
-          <a:prstGeom prst="rect">
-            <a:avLst/>
-          </a:prstGeom>
-          <a:noFill/>
-          <a:ln/>
-        </p:spPr>
-        <p:txBody>
-          <a:bodyPr wrap="square" lIns="0" tIns="0" rIns="0" bIns="0" rtlCol="0" anchor="ctr"/>
-          <a:lstStyle/>
-          <a:p>
-            <a:pPr algn="r" indent="0" marL="0">
-              <a:buNone/>
-            </a:pPr>
-            <a:r>
-              <a:rPr lang="en-US" sz="900" dirty="0">
-                <a:solidFill>
-                  <a:srgbClr val="5D5D72"/>
-                </a:solidFill>
-                <a:latin typeface="Calibri" pitchFamily="34" charset="0"/>
-                <a:ea typeface="Calibri" pitchFamily="34" charset="-122"/>
-                <a:cs typeface="Calibri" pitchFamily="34" charset="-120"/>
-              </a:rPr>
-              <a:t>16</a:t>
-            </a:r>
-            <a:endParaRPr lang="en-US" sz="900" dirty="0"/>
+            <a:off x="9951720" y="6455664"/>
+            <a:ext cx="2011680" cy="292608"/>
+          </a:xfrm>
+          <a:prstGeom prst="rect">
+            <a:avLst/>
+          </a:prstGeom>
+          <a:noFill/>
+        </p:spPr>
+        <p:txBody>
+          <a:bodyPr wrap="none" lIns="0" rIns="0" tIns="0" bIns="0">
+            <a:spAutoFit/>
+          </a:bodyPr>
+          <a:lstStyle/>
+          <a:p>
+            <a:pPr algn="r"/>
+            <a:r>
+              <a:rPr sz="1000">
+                <a:solidFill>
+                  <a:srgbClr val="8A939B"/>
+                </a:solidFill>
+                <a:hlinkClick r:id="rId3"/>
+              </a:rPr>
+              <a:t>cuinotes.com</a:t>
+            </a:r>
+            <a:r>
+              <a:rPr sz="1000">
+                <a:solidFill>
+                  <a:srgbClr val="8A939B"/>
+                </a:solidFill>
+              </a:rPr>
+              <a:t>  ·  16</a:t>
+            </a:r>
           </a:p>
         </p:txBody>
       </p:sp>
@@ -5889,6 +5637,10 @@
           </a:solidFill>
           <a:ln/>
         </p:spPr>
+        <p:txBody>
+          <a:bodyPr/>
+          <a:p/>
+        </p:txBody>
       </p:sp>
       <p:sp>
         <p:nvSpPr>
@@ -5969,6 +5721,10 @@
             <a:tailEnd type="triangle"/>
           </a:ln>
         </p:spPr>
+        <p:txBody>
+          <a:bodyPr/>
+          <a:p/>
+        </p:txBody>
       </p:sp>
       <p:sp>
         <p:nvSpPr>
@@ -5991,6 +5747,10 @@
           </a:solidFill>
           <a:ln/>
         </p:spPr>
+        <p:txBody>
+          <a:bodyPr/>
+          <a:p/>
+        </p:txBody>
       </p:sp>
       <p:sp>
         <p:nvSpPr>
@@ -6088,6 +5848,10 @@
             <a:tailEnd type="triangle"/>
           </a:ln>
         </p:spPr>
+        <p:txBody>
+          <a:bodyPr/>
+          <a:p/>
+        </p:txBody>
       </p:sp>
       <p:sp>
         <p:nvSpPr>
@@ -6110,6 +5874,10 @@
           </a:solidFill>
           <a:ln/>
         </p:spPr>
+        <p:txBody>
+          <a:bodyPr/>
+          <a:p/>
+        </p:txBody>
       </p:sp>
       <p:sp>
         <p:nvSpPr>
@@ -6207,6 +5975,10 @@
             <a:tailEnd type="triangle"/>
           </a:ln>
         </p:spPr>
+        <p:txBody>
+          <a:bodyPr/>
+          <a:p/>
+        </p:txBody>
       </p:sp>
       <p:sp>
         <p:nvSpPr>
@@ -6229,6 +6001,10 @@
           </a:solidFill>
           <a:ln/>
         </p:spPr>
+        <p:txBody>
+          <a:bodyPr/>
+          <a:p/>
+        </p:txBody>
       </p:sp>
       <p:sp>
         <p:nvSpPr>
@@ -6344,79 +6120,44 @@
       </p:sp>
       <p:sp>
         <p:nvSpPr>
-          <p:cNvPr id="16" name="Text 14"/>
+          <p:cNvPr id="18" name="cuinotes-footer-mark"/>
           <p:cNvSpPr txBox="1"/>
           <p:nvPr/>
         </p:nvSpPr>
         <p:spPr>
           <a:xfrm>
-            <a:off x="640080" y="6446520"/>
-            <a:ext cx="8686800" cy="292608"/>
-          </a:xfrm>
-          <a:prstGeom prst="rect">
-            <a:avLst/>
-          </a:prstGeom>
-          <a:noFill/>
-          <a:ln/>
-        </p:spPr>
-        <p:txBody>
-          <a:bodyPr wrap="square" lIns="0" tIns="0" rIns="0" bIns="0" rtlCol="0" anchor="ctr"/>
-          <a:lstStyle/>
-          <a:p>
-            <a:pPr algn="l" indent="0" marL="0">
-              <a:buNone/>
-            </a:pPr>
-            <a:r>
-              <a:rPr lang="en-US" sz="900" dirty="0">
-                <a:solidFill>
-                  <a:srgbClr val="5D5D72"/>
-                </a:solidFill>
-                <a:latin typeface="Calibri" pitchFamily="34" charset="0"/>
-                <a:ea typeface="Calibri" pitchFamily="34" charset="-122"/>
-                <a:cs typeface="Calibri" pitchFamily="34" charset="-120"/>
-              </a:rPr>
-              <a:t>Usman Akram  •  COMSATS University Islamabad</a:t>
-            </a:r>
-            <a:endParaRPr lang="en-US" sz="900" dirty="0"/>
-          </a:p>
-        </p:txBody>
-      </p:sp>
-      <p:sp>
-        <p:nvSpPr>
-          <p:cNvPr id="17" name="Text 15"/>
-          <p:cNvSpPr txBox="1"/>
-          <p:nvPr/>
-        </p:nvSpPr>
-        <p:spPr>
-          <a:xfrm>
-            <a:off x="11155680" y="6446520"/>
-            <a:ext cx="457200" cy="292608"/>
-          </a:xfrm>
-          <a:prstGeom prst="rect">
-            <a:avLst/>
-          </a:prstGeom>
-          <a:noFill/>
-          <a:ln/>
-        </p:spPr>
-        <p:txBody>
-          <a:bodyPr wrap="square" lIns="0" tIns="0" rIns="0" bIns="0" rtlCol="0" anchor="ctr"/>
-          <a:lstStyle/>
-          <a:p>
-            <a:pPr algn="r" indent="0" marL="0">
-              <a:buNone/>
-            </a:pPr>
-            <a:r>
-              <a:rPr lang="en-US" sz="900" dirty="0">
-                <a:solidFill>
-                  <a:srgbClr val="5D5D72"/>
-                </a:solidFill>
-                <a:latin typeface="Calibri" pitchFamily="34" charset="0"/>
-                <a:ea typeface="Calibri" pitchFamily="34" charset="-122"/>
-                <a:cs typeface="Calibri" pitchFamily="34" charset="-120"/>
-              </a:rPr>
-              <a:t>17</a:t>
-            </a:r>
-            <a:endParaRPr lang="en-US" sz="900" dirty="0"/>
+            <a:off x="9951720" y="6455664"/>
+            <a:ext cx="2011680" cy="292608"/>
+          </a:xfrm>
+          <a:prstGeom prst="rect">
+            <a:avLst/>
+          </a:prstGeom>
+          <a:noFill/>
+        </p:spPr>
+        <p:txBody>
+          <a:bodyPr wrap="none" lIns="0" rIns="0" tIns="0" bIns="0">
+            <a:spAutoFit/>
+          </a:bodyPr>
+          <a:lstStyle/>
+          <a:p>
+            <a:pPr algn="r"/>
+            <a:r>
+              <a:rPr sz="1000">
+                <a:solidFill>
+                  <a:srgbClr val="8A939B"/>
+                </a:solidFill>
+                <a:hlinkClick r:id="rId3"/>
+              </a:rPr>
+              <a:t>cuinotes.com</a:t>
+            </a:r>
+            <a:r>
+              <a:rPr sz="1000">
+                <a:solidFill>
+                  <a:srgbClr val="8A939B"/>
+                </a:solidFill>
+              </a:rPr>
+              <a:t>  ·  17</a:t>
+            </a:r>
           </a:p>
         </p:txBody>
       </p:sp>
@@ -6556,6 +6297,10 @@
             <a:prstDash val="solid"/>
           </a:ln>
         </p:spPr>
+        <p:txBody>
+          <a:bodyPr/>
+          <a:p/>
+        </p:txBody>
       </p:sp>
       <p:sp>
         <p:nvSpPr>
@@ -6637,79 +6382,44 @@
       </p:sp>
       <p:sp>
         <p:nvSpPr>
-          <p:cNvPr id="7" name="Text 5"/>
+          <p:cNvPr id="9" name="cuinotes-footer-mark"/>
           <p:cNvSpPr txBox="1"/>
           <p:nvPr/>
         </p:nvSpPr>
         <p:spPr>
           <a:xfrm>
-            <a:off x="640080" y="6446520"/>
-            <a:ext cx="8686800" cy="292608"/>
-          </a:xfrm>
-          <a:prstGeom prst="rect">
-            <a:avLst/>
-          </a:prstGeom>
-          <a:noFill/>
-          <a:ln/>
-        </p:spPr>
-        <p:txBody>
-          <a:bodyPr wrap="square" lIns="0" tIns="0" rIns="0" bIns="0" rtlCol="0" anchor="ctr"/>
-          <a:lstStyle/>
-          <a:p>
-            <a:pPr algn="l" indent="0" marL="0">
-              <a:buNone/>
-            </a:pPr>
-            <a:r>
-              <a:rPr lang="en-US" sz="900" dirty="0">
-                <a:solidFill>
-                  <a:srgbClr val="5D5D72"/>
-                </a:solidFill>
-                <a:latin typeface="Calibri" pitchFamily="34" charset="0"/>
-                <a:ea typeface="Calibri" pitchFamily="34" charset="-122"/>
-                <a:cs typeface="Calibri" pitchFamily="34" charset="-120"/>
-              </a:rPr>
-              <a:t>Usman Akram  •  COMSATS University Islamabad</a:t>
-            </a:r>
-            <a:endParaRPr lang="en-US" sz="900" dirty="0"/>
-          </a:p>
-        </p:txBody>
-      </p:sp>
-      <p:sp>
-        <p:nvSpPr>
-          <p:cNvPr id="8" name="Text 6"/>
-          <p:cNvSpPr txBox="1"/>
-          <p:nvPr/>
-        </p:nvSpPr>
-        <p:spPr>
-          <a:xfrm>
-            <a:off x="11155680" y="6446520"/>
-            <a:ext cx="457200" cy="292608"/>
-          </a:xfrm>
-          <a:prstGeom prst="rect">
-            <a:avLst/>
-          </a:prstGeom>
-          <a:noFill/>
-          <a:ln/>
-        </p:spPr>
-        <p:txBody>
-          <a:bodyPr wrap="square" lIns="0" tIns="0" rIns="0" bIns="0" rtlCol="0" anchor="ctr"/>
-          <a:lstStyle/>
-          <a:p>
-            <a:pPr algn="r" indent="0" marL="0">
-              <a:buNone/>
-            </a:pPr>
-            <a:r>
-              <a:rPr lang="en-US" sz="900" dirty="0">
-                <a:solidFill>
-                  <a:srgbClr val="5D5D72"/>
-                </a:solidFill>
-                <a:latin typeface="Calibri" pitchFamily="34" charset="0"/>
-                <a:ea typeface="Calibri" pitchFamily="34" charset="-122"/>
-                <a:cs typeface="Calibri" pitchFamily="34" charset="-120"/>
-              </a:rPr>
-              <a:t>18</a:t>
-            </a:r>
-            <a:endParaRPr lang="en-US" sz="900" dirty="0"/>
+            <a:off x="9951720" y="6455664"/>
+            <a:ext cx="2011680" cy="292608"/>
+          </a:xfrm>
+          <a:prstGeom prst="rect">
+            <a:avLst/>
+          </a:prstGeom>
+          <a:noFill/>
+        </p:spPr>
+        <p:txBody>
+          <a:bodyPr wrap="none" lIns="0" rIns="0" tIns="0" bIns="0">
+            <a:spAutoFit/>
+          </a:bodyPr>
+          <a:lstStyle/>
+          <a:p>
+            <a:pPr algn="r"/>
+            <a:r>
+              <a:rPr sz="1000">
+                <a:solidFill>
+                  <a:srgbClr val="8A939B"/>
+                </a:solidFill>
+                <a:hlinkClick r:id="rId3"/>
+              </a:rPr>
+              <a:t>cuinotes.com</a:t>
+            </a:r>
+            <a:r>
+              <a:rPr sz="1000">
+                <a:solidFill>
+                  <a:srgbClr val="8A939B"/>
+                </a:solidFill>
+              </a:rPr>
+              <a:t>  ·  18</a:t>
+            </a:r>
           </a:p>
         </p:txBody>
       </p:sp>
@@ -6844,6 +6554,10 @@
           </a:solidFill>
           <a:ln/>
         </p:spPr>
+        <p:txBody>
+          <a:bodyPr/>
+          <a:p/>
+        </p:txBody>
       </p:sp>
       <p:sp>
         <p:nvSpPr>
@@ -7147,79 +6861,44 @@
       </p:sp>
       <p:sp>
         <p:nvSpPr>
-          <p:cNvPr id="6" name="Text 4"/>
+          <p:cNvPr id="8" name="cuinotes-footer-mark"/>
           <p:cNvSpPr txBox="1"/>
           <p:nvPr/>
         </p:nvSpPr>
         <p:spPr>
           <a:xfrm>
-            <a:off x="640080" y="6446520"/>
-            <a:ext cx="8686800" cy="292608"/>
-          </a:xfrm>
-          <a:prstGeom prst="rect">
-            <a:avLst/>
-          </a:prstGeom>
-          <a:noFill/>
-          <a:ln/>
-        </p:spPr>
-        <p:txBody>
-          <a:bodyPr wrap="square" lIns="0" tIns="0" rIns="0" bIns="0" rtlCol="0" anchor="ctr"/>
-          <a:lstStyle/>
-          <a:p>
-            <a:pPr algn="l" indent="0" marL="0">
-              <a:buNone/>
-            </a:pPr>
-            <a:r>
-              <a:rPr lang="en-US" sz="900" dirty="0">
-                <a:solidFill>
-                  <a:srgbClr val="5D5D72"/>
-                </a:solidFill>
-                <a:latin typeface="Calibri" pitchFamily="34" charset="0"/>
-                <a:ea typeface="Calibri" pitchFamily="34" charset="-122"/>
-                <a:cs typeface="Calibri" pitchFamily="34" charset="-120"/>
-              </a:rPr>
-              <a:t>Usman Akram  •  COMSATS University Islamabad</a:t>
-            </a:r>
-            <a:endParaRPr lang="en-US" sz="900" dirty="0"/>
-          </a:p>
-        </p:txBody>
-      </p:sp>
-      <p:sp>
-        <p:nvSpPr>
-          <p:cNvPr id="7" name="Text 5"/>
-          <p:cNvSpPr txBox="1"/>
-          <p:nvPr/>
-        </p:nvSpPr>
-        <p:spPr>
-          <a:xfrm>
-            <a:off x="11155680" y="6446520"/>
-            <a:ext cx="457200" cy="292608"/>
-          </a:xfrm>
-          <a:prstGeom prst="rect">
-            <a:avLst/>
-          </a:prstGeom>
-          <a:noFill/>
-          <a:ln/>
-        </p:spPr>
-        <p:txBody>
-          <a:bodyPr wrap="square" lIns="0" tIns="0" rIns="0" bIns="0" rtlCol="0" anchor="ctr"/>
-          <a:lstStyle/>
-          <a:p>
-            <a:pPr algn="r" indent="0" marL="0">
-              <a:buNone/>
-            </a:pPr>
-            <a:r>
-              <a:rPr lang="en-US" sz="900" dirty="0">
-                <a:solidFill>
-                  <a:srgbClr val="5D5D72"/>
-                </a:solidFill>
-                <a:latin typeface="Calibri" pitchFamily="34" charset="0"/>
-                <a:ea typeface="Calibri" pitchFamily="34" charset="-122"/>
-                <a:cs typeface="Calibri" pitchFamily="34" charset="-120"/>
-              </a:rPr>
-              <a:t>19</a:t>
-            </a:r>
-            <a:endParaRPr lang="en-US" sz="900" dirty="0"/>
+            <a:off x="9951720" y="6455664"/>
+            <a:ext cx="2011680" cy="292608"/>
+          </a:xfrm>
+          <a:prstGeom prst="rect">
+            <a:avLst/>
+          </a:prstGeom>
+          <a:noFill/>
+        </p:spPr>
+        <p:txBody>
+          <a:bodyPr wrap="none" lIns="0" rIns="0" tIns="0" bIns="0">
+            <a:spAutoFit/>
+          </a:bodyPr>
+          <a:lstStyle/>
+          <a:p>
+            <a:pPr algn="r"/>
+            <a:r>
+              <a:rPr sz="1000">
+                <a:solidFill>
+                  <a:srgbClr val="8A939B"/>
+                </a:solidFill>
+                <a:hlinkClick r:id="rId3"/>
+              </a:rPr>
+              <a:t>cuinotes.com</a:t>
+            </a:r>
+            <a:r>
+              <a:rPr sz="1000">
+                <a:solidFill>
+                  <a:srgbClr val="8A939B"/>
+                </a:solidFill>
+              </a:rPr>
+              <a:t>  ·  19</a:t>
+            </a:r>
           </a:p>
         </p:txBody>
       </p:sp>
@@ -7352,6 +7031,10 @@
           </a:solidFill>
           <a:ln/>
         </p:spPr>
+        <p:txBody>
+          <a:bodyPr/>
+          <a:p/>
+        </p:txBody>
       </p:sp>
       <p:sp>
         <p:nvSpPr>
@@ -7450,6 +7133,10 @@
           </a:solidFill>
           <a:ln/>
         </p:spPr>
+        <p:txBody>
+          <a:bodyPr/>
+          <a:p/>
+        </p:txBody>
       </p:sp>
       <p:sp>
         <p:nvSpPr>
@@ -7548,6 +7235,10 @@
           </a:solidFill>
           <a:ln/>
         </p:spPr>
+        <p:txBody>
+          <a:bodyPr/>
+          <a:p/>
+        </p:txBody>
       </p:sp>
       <p:sp>
         <p:nvSpPr>
@@ -7646,6 +7337,10 @@
           </a:solidFill>
           <a:ln/>
         </p:spPr>
+        <p:txBody>
+          <a:bodyPr/>
+          <a:p/>
+        </p:txBody>
       </p:sp>
       <p:sp>
         <p:nvSpPr>
@@ -7744,6 +7439,10 @@
           </a:solidFill>
           <a:ln/>
         </p:spPr>
+        <p:txBody>
+          <a:bodyPr/>
+          <a:p/>
+        </p:txBody>
       </p:sp>
       <p:sp>
         <p:nvSpPr>
@@ -7842,6 +7541,10 @@
           </a:solidFill>
           <a:ln/>
         </p:spPr>
+        <p:txBody>
+          <a:bodyPr/>
+          <a:p/>
+        </p:txBody>
       </p:sp>
       <p:sp>
         <p:nvSpPr>
@@ -7923,79 +7626,44 @@
       </p:sp>
       <p:sp>
         <p:nvSpPr>
-          <p:cNvPr id="22" name="Text 20"/>
+          <p:cNvPr id="24" name="cuinotes-footer-mark"/>
           <p:cNvSpPr txBox="1"/>
           <p:nvPr/>
         </p:nvSpPr>
         <p:spPr>
           <a:xfrm>
-            <a:off x="640080" y="6446520"/>
-            <a:ext cx="8686800" cy="292608"/>
-          </a:xfrm>
-          <a:prstGeom prst="rect">
-            <a:avLst/>
-          </a:prstGeom>
-          <a:noFill/>
-          <a:ln/>
-        </p:spPr>
-        <p:txBody>
-          <a:bodyPr wrap="square" lIns="0" tIns="0" rIns="0" bIns="0" rtlCol="0" anchor="ctr"/>
-          <a:lstStyle/>
-          <a:p>
-            <a:pPr algn="l" indent="0" marL="0">
-              <a:buNone/>
-            </a:pPr>
-            <a:r>
-              <a:rPr lang="en-US" sz="900" dirty="0">
-                <a:solidFill>
-                  <a:srgbClr val="5D5D72"/>
-                </a:solidFill>
-                <a:latin typeface="Calibri" pitchFamily="34" charset="0"/>
-                <a:ea typeface="Calibri" pitchFamily="34" charset="-122"/>
-                <a:cs typeface="Calibri" pitchFamily="34" charset="-120"/>
-              </a:rPr>
-              <a:t>Usman Akram  •  COMSATS University Islamabad</a:t>
-            </a:r>
-            <a:endParaRPr lang="en-US" sz="900" dirty="0"/>
-          </a:p>
-        </p:txBody>
-      </p:sp>
-      <p:sp>
-        <p:nvSpPr>
-          <p:cNvPr id="23" name="Text 21"/>
-          <p:cNvSpPr txBox="1"/>
-          <p:nvPr/>
-        </p:nvSpPr>
-        <p:spPr>
-          <a:xfrm>
-            <a:off x="11155680" y="6446520"/>
-            <a:ext cx="457200" cy="292608"/>
-          </a:xfrm>
-          <a:prstGeom prst="rect">
-            <a:avLst/>
-          </a:prstGeom>
-          <a:noFill/>
-          <a:ln/>
-        </p:spPr>
-        <p:txBody>
-          <a:bodyPr wrap="square" lIns="0" tIns="0" rIns="0" bIns="0" rtlCol="0" anchor="ctr"/>
-          <a:lstStyle/>
-          <a:p>
-            <a:pPr algn="r" indent="0" marL="0">
-              <a:buNone/>
-            </a:pPr>
-            <a:r>
-              <a:rPr lang="en-US" sz="900" dirty="0">
-                <a:solidFill>
-                  <a:srgbClr val="5D5D72"/>
-                </a:solidFill>
-                <a:latin typeface="Calibri" pitchFamily="34" charset="0"/>
-                <a:ea typeface="Calibri" pitchFamily="34" charset="-122"/>
-                <a:cs typeface="Calibri" pitchFamily="34" charset="-120"/>
-              </a:rPr>
-              <a:t>2</a:t>
-            </a:r>
-            <a:endParaRPr lang="en-US" sz="900" dirty="0"/>
+            <a:off x="9951720" y="6455664"/>
+            <a:ext cx="2011680" cy="292608"/>
+          </a:xfrm>
+          <a:prstGeom prst="rect">
+            <a:avLst/>
+          </a:prstGeom>
+          <a:noFill/>
+        </p:spPr>
+        <p:txBody>
+          <a:bodyPr wrap="none" lIns="0" rIns="0" tIns="0" bIns="0">
+            <a:spAutoFit/>
+          </a:bodyPr>
+          <a:lstStyle/>
+          <a:p>
+            <a:pPr algn="r"/>
+            <a:r>
+              <a:rPr sz="1000">
+                <a:solidFill>
+                  <a:srgbClr val="8A939B"/>
+                </a:solidFill>
+                <a:hlinkClick r:id="rId3"/>
+              </a:rPr>
+              <a:t>cuinotes.com</a:t>
+            </a:r>
+            <a:r>
+              <a:rPr sz="1000">
+                <a:solidFill>
+                  <a:srgbClr val="8A939B"/>
+                </a:solidFill>
+              </a:rPr>
+              <a:t>  ·  2</a:t>
+            </a:r>
           </a:p>
         </p:txBody>
       </p:sp>
@@ -8130,6 +7798,10 @@
           </a:solidFill>
           <a:ln/>
         </p:spPr>
+        <p:txBody>
+          <a:bodyPr/>
+          <a:p/>
+        </p:txBody>
       </p:sp>
       <p:sp>
         <p:nvSpPr>
@@ -8234,79 +7906,44 @@
       </p:sp>
       <p:sp>
         <p:nvSpPr>
-          <p:cNvPr id="7" name="Text 5"/>
+          <p:cNvPr id="9" name="cuinotes-footer-mark"/>
           <p:cNvSpPr txBox="1"/>
           <p:nvPr/>
         </p:nvSpPr>
         <p:spPr>
           <a:xfrm>
-            <a:off x="640080" y="6446520"/>
-            <a:ext cx="8686800" cy="292608"/>
-          </a:xfrm>
-          <a:prstGeom prst="rect">
-            <a:avLst/>
-          </a:prstGeom>
-          <a:noFill/>
-          <a:ln/>
-        </p:spPr>
-        <p:txBody>
-          <a:bodyPr wrap="square" lIns="0" tIns="0" rIns="0" bIns="0" rtlCol="0" anchor="ctr"/>
-          <a:lstStyle/>
-          <a:p>
-            <a:pPr algn="l" indent="0" marL="0">
-              <a:buNone/>
-            </a:pPr>
-            <a:r>
-              <a:rPr lang="en-US" sz="900" dirty="0">
-                <a:solidFill>
-                  <a:srgbClr val="5D5D72"/>
-                </a:solidFill>
-                <a:latin typeface="Calibri" pitchFamily="34" charset="0"/>
-                <a:ea typeface="Calibri" pitchFamily="34" charset="-122"/>
-                <a:cs typeface="Calibri" pitchFamily="34" charset="-120"/>
-              </a:rPr>
-              <a:t>Usman Akram  •  COMSATS University Islamabad</a:t>
-            </a:r>
-            <a:endParaRPr lang="en-US" sz="900" dirty="0"/>
-          </a:p>
-        </p:txBody>
-      </p:sp>
-      <p:sp>
-        <p:nvSpPr>
-          <p:cNvPr id="8" name="Text 6"/>
-          <p:cNvSpPr txBox="1"/>
-          <p:nvPr/>
-        </p:nvSpPr>
-        <p:spPr>
-          <a:xfrm>
-            <a:off x="11155680" y="6446520"/>
-            <a:ext cx="457200" cy="292608"/>
-          </a:xfrm>
-          <a:prstGeom prst="rect">
-            <a:avLst/>
-          </a:prstGeom>
-          <a:noFill/>
-          <a:ln/>
-        </p:spPr>
-        <p:txBody>
-          <a:bodyPr wrap="square" lIns="0" tIns="0" rIns="0" bIns="0" rtlCol="0" anchor="ctr"/>
-          <a:lstStyle/>
-          <a:p>
-            <a:pPr algn="r" indent="0" marL="0">
-              <a:buNone/>
-            </a:pPr>
-            <a:r>
-              <a:rPr lang="en-US" sz="900" dirty="0">
-                <a:solidFill>
-                  <a:srgbClr val="5D5D72"/>
-                </a:solidFill>
-                <a:latin typeface="Calibri" pitchFamily="34" charset="0"/>
-                <a:ea typeface="Calibri" pitchFamily="34" charset="-122"/>
-                <a:cs typeface="Calibri" pitchFamily="34" charset="-120"/>
-              </a:rPr>
-              <a:t>20</a:t>
-            </a:r>
-            <a:endParaRPr lang="en-US" sz="900" dirty="0"/>
+            <a:off x="9951720" y="6455664"/>
+            <a:ext cx="2011680" cy="292608"/>
+          </a:xfrm>
+          <a:prstGeom prst="rect">
+            <a:avLst/>
+          </a:prstGeom>
+          <a:noFill/>
+        </p:spPr>
+        <p:txBody>
+          <a:bodyPr wrap="none" lIns="0" rIns="0" tIns="0" bIns="0">
+            <a:spAutoFit/>
+          </a:bodyPr>
+          <a:lstStyle/>
+          <a:p>
+            <a:pPr algn="r"/>
+            <a:r>
+              <a:rPr sz="1000">
+                <a:solidFill>
+                  <a:srgbClr val="8A939B"/>
+                </a:solidFill>
+                <a:hlinkClick r:id="rId3"/>
+              </a:rPr>
+              <a:t>cuinotes.com</a:t>
+            </a:r>
+            <a:r>
+              <a:rPr sz="1000">
+                <a:solidFill>
+                  <a:srgbClr val="8A939B"/>
+                </a:solidFill>
+              </a:rPr>
+              <a:t>  ·  20</a:t>
+            </a:r>
           </a:p>
         </p:txBody>
       </p:sp>
@@ -9043,79 +8680,44 @@
       </p:sp>
       <p:sp>
         <p:nvSpPr>
-          <p:cNvPr id="6" name="Text 3"/>
+          <p:cNvPr id="23" name="cuinotes-footer-mark"/>
           <p:cNvSpPr txBox="1"/>
           <p:nvPr/>
         </p:nvSpPr>
         <p:spPr>
           <a:xfrm>
-            <a:off x="640080" y="6446520"/>
-            <a:ext cx="8686800" cy="292608"/>
-          </a:xfrm>
-          <a:prstGeom prst="rect">
-            <a:avLst/>
-          </a:prstGeom>
-          <a:noFill/>
-          <a:ln/>
-        </p:spPr>
-        <p:txBody>
-          <a:bodyPr wrap="square" lIns="0" tIns="0" rIns="0" bIns="0" rtlCol="0" anchor="ctr"/>
-          <a:lstStyle/>
-          <a:p>
-            <a:pPr algn="l" indent="0" marL="0">
-              <a:buNone/>
-            </a:pPr>
-            <a:r>
-              <a:rPr lang="en-US" sz="900" dirty="0">
-                <a:solidFill>
-                  <a:srgbClr val="5D5D72"/>
-                </a:solidFill>
-                <a:latin typeface="Calibri" pitchFamily="34" charset="0"/>
-                <a:ea typeface="Calibri" pitchFamily="34" charset="-122"/>
-                <a:cs typeface="Calibri" pitchFamily="34" charset="-120"/>
-              </a:rPr>
-              <a:t>Usman Akram  •  COMSATS University Islamabad</a:t>
-            </a:r>
-            <a:endParaRPr lang="en-US" sz="900" dirty="0"/>
-          </a:p>
-        </p:txBody>
-      </p:sp>
-      <p:sp>
-        <p:nvSpPr>
-          <p:cNvPr id="7" name="Text 4"/>
-          <p:cNvSpPr txBox="1"/>
-          <p:nvPr/>
-        </p:nvSpPr>
-        <p:spPr>
-          <a:xfrm>
-            <a:off x="11155680" y="6446520"/>
-            <a:ext cx="457200" cy="292608"/>
-          </a:xfrm>
-          <a:prstGeom prst="rect">
-            <a:avLst/>
-          </a:prstGeom>
-          <a:noFill/>
-          <a:ln/>
-        </p:spPr>
-        <p:txBody>
-          <a:bodyPr wrap="square" lIns="0" tIns="0" rIns="0" bIns="0" rtlCol="0" anchor="ctr"/>
-          <a:lstStyle/>
-          <a:p>
-            <a:pPr algn="r" indent="0" marL="0">
-              <a:buNone/>
-            </a:pPr>
-            <a:r>
-              <a:rPr lang="en-US" sz="900" dirty="0">
-                <a:solidFill>
-                  <a:srgbClr val="5D5D72"/>
-                </a:solidFill>
-                <a:latin typeface="Calibri" pitchFamily="34" charset="0"/>
-                <a:ea typeface="Calibri" pitchFamily="34" charset="-122"/>
-                <a:cs typeface="Calibri" pitchFamily="34" charset="-120"/>
-              </a:rPr>
-              <a:t>21</a:t>
-            </a:r>
-            <a:endParaRPr lang="en-US" sz="900" dirty="0"/>
+            <a:off x="9951720" y="6455664"/>
+            <a:ext cx="2011680" cy="292608"/>
+          </a:xfrm>
+          <a:prstGeom prst="rect">
+            <a:avLst/>
+          </a:prstGeom>
+          <a:noFill/>
+        </p:spPr>
+        <p:txBody>
+          <a:bodyPr wrap="none" lIns="0" rIns="0" tIns="0" bIns="0">
+            <a:spAutoFit/>
+          </a:bodyPr>
+          <a:lstStyle/>
+          <a:p>
+            <a:pPr algn="r"/>
+            <a:r>
+              <a:rPr sz="1000">
+                <a:solidFill>
+                  <a:srgbClr val="8A939B"/>
+                </a:solidFill>
+                <a:hlinkClick r:id="rId3"/>
+              </a:rPr>
+              <a:t>cuinotes.com</a:t>
+            </a:r>
+            <a:r>
+              <a:rPr sz="1000">
+                <a:solidFill>
+                  <a:srgbClr val="8A939B"/>
+                </a:solidFill>
+              </a:rPr>
+              <a:t>  ·  21</a:t>
+            </a:r>
           </a:p>
         </p:txBody>
       </p:sp>
@@ -9250,6 +8852,10 @@
           </a:solidFill>
           <a:ln/>
         </p:spPr>
+        <p:txBody>
+          <a:bodyPr/>
+          <a:p/>
+        </p:txBody>
       </p:sp>
       <p:sp>
         <p:nvSpPr>
@@ -9473,79 +9079,44 @@
       </p:sp>
       <p:sp>
         <p:nvSpPr>
-          <p:cNvPr id="6" name="Text 4"/>
+          <p:cNvPr id="8" name="cuinotes-footer-mark"/>
           <p:cNvSpPr txBox="1"/>
           <p:nvPr/>
         </p:nvSpPr>
         <p:spPr>
           <a:xfrm>
-            <a:off x="640080" y="6446520"/>
-            <a:ext cx="8686800" cy="292608"/>
-          </a:xfrm>
-          <a:prstGeom prst="rect">
-            <a:avLst/>
-          </a:prstGeom>
-          <a:noFill/>
-          <a:ln/>
-        </p:spPr>
-        <p:txBody>
-          <a:bodyPr wrap="square" lIns="0" tIns="0" rIns="0" bIns="0" rtlCol="0" anchor="ctr"/>
-          <a:lstStyle/>
-          <a:p>
-            <a:pPr algn="l" indent="0" marL="0">
-              <a:buNone/>
-            </a:pPr>
-            <a:r>
-              <a:rPr lang="en-US" sz="900" dirty="0">
-                <a:solidFill>
-                  <a:srgbClr val="5D5D72"/>
-                </a:solidFill>
-                <a:latin typeface="Calibri" pitchFamily="34" charset="0"/>
-                <a:ea typeface="Calibri" pitchFamily="34" charset="-122"/>
-                <a:cs typeface="Calibri" pitchFamily="34" charset="-120"/>
-              </a:rPr>
-              <a:t>Usman Akram  •  COMSATS University Islamabad</a:t>
-            </a:r>
-            <a:endParaRPr lang="en-US" sz="900" dirty="0"/>
-          </a:p>
-        </p:txBody>
-      </p:sp>
-      <p:sp>
-        <p:nvSpPr>
-          <p:cNvPr id="7" name="Text 5"/>
-          <p:cNvSpPr txBox="1"/>
-          <p:nvPr/>
-        </p:nvSpPr>
-        <p:spPr>
-          <a:xfrm>
-            <a:off x="11155680" y="6446520"/>
-            <a:ext cx="457200" cy="292608"/>
-          </a:xfrm>
-          <a:prstGeom prst="rect">
-            <a:avLst/>
-          </a:prstGeom>
-          <a:noFill/>
-          <a:ln/>
-        </p:spPr>
-        <p:txBody>
-          <a:bodyPr wrap="square" lIns="0" tIns="0" rIns="0" bIns="0" rtlCol="0" anchor="ctr"/>
-          <a:lstStyle/>
-          <a:p>
-            <a:pPr algn="r" indent="0" marL="0">
-              <a:buNone/>
-            </a:pPr>
-            <a:r>
-              <a:rPr lang="en-US" sz="900" dirty="0">
-                <a:solidFill>
-                  <a:srgbClr val="5D5D72"/>
-                </a:solidFill>
-                <a:latin typeface="Calibri" pitchFamily="34" charset="0"/>
-                <a:ea typeface="Calibri" pitchFamily="34" charset="-122"/>
-                <a:cs typeface="Calibri" pitchFamily="34" charset="-120"/>
-              </a:rPr>
-              <a:t>22</a:t>
-            </a:r>
-            <a:endParaRPr lang="en-US" sz="900" dirty="0"/>
+            <a:off x="9951720" y="6455664"/>
+            <a:ext cx="2011680" cy="292608"/>
+          </a:xfrm>
+          <a:prstGeom prst="rect">
+            <a:avLst/>
+          </a:prstGeom>
+          <a:noFill/>
+        </p:spPr>
+        <p:txBody>
+          <a:bodyPr wrap="none" lIns="0" rIns="0" tIns="0" bIns="0">
+            <a:spAutoFit/>
+          </a:bodyPr>
+          <a:lstStyle/>
+          <a:p>
+            <a:pPr algn="r"/>
+            <a:r>
+              <a:rPr sz="1000">
+                <a:solidFill>
+                  <a:srgbClr val="8A939B"/>
+                </a:solidFill>
+                <a:hlinkClick r:id="rId3"/>
+              </a:rPr>
+              <a:t>cuinotes.com</a:t>
+            </a:r>
+            <a:r>
+              <a:rPr sz="1000">
+                <a:solidFill>
+                  <a:srgbClr val="8A939B"/>
+                </a:solidFill>
+              </a:rPr>
+              <a:t>  ·  22</a:t>
+            </a:r>
           </a:p>
         </p:txBody>
       </p:sp>
@@ -9678,6 +9249,10 @@
           </a:solidFill>
           <a:ln/>
         </p:spPr>
+        <p:txBody>
+          <a:bodyPr/>
+          <a:p/>
+        </p:txBody>
       </p:sp>
       <p:sp>
         <p:nvSpPr>
@@ -9776,6 +9351,10 @@
           </a:solidFill>
           <a:ln/>
         </p:spPr>
+        <p:txBody>
+          <a:bodyPr/>
+          <a:p/>
+        </p:txBody>
       </p:sp>
       <p:sp>
         <p:nvSpPr>
@@ -9874,6 +9453,10 @@
           </a:solidFill>
           <a:ln/>
         </p:spPr>
+        <p:txBody>
+          <a:bodyPr/>
+          <a:p/>
+        </p:txBody>
       </p:sp>
       <p:sp>
         <p:nvSpPr>
@@ -9972,6 +9555,10 @@
           </a:solidFill>
           <a:ln/>
         </p:spPr>
+        <p:txBody>
+          <a:bodyPr/>
+          <a:p/>
+        </p:txBody>
       </p:sp>
       <p:sp>
         <p:nvSpPr>
@@ -10070,6 +9657,10 @@
           </a:solidFill>
           <a:ln/>
         </p:spPr>
+        <p:txBody>
+          <a:bodyPr/>
+          <a:p/>
+        </p:txBody>
       </p:sp>
       <p:sp>
         <p:nvSpPr>
@@ -10168,6 +9759,10 @@
           </a:solidFill>
           <a:ln/>
         </p:spPr>
+        <p:txBody>
+          <a:bodyPr/>
+          <a:p/>
+        </p:txBody>
       </p:sp>
       <p:sp>
         <p:nvSpPr>
@@ -10266,6 +9861,10 @@
           </a:solidFill>
           <a:ln/>
         </p:spPr>
+        <p:txBody>
+          <a:bodyPr/>
+          <a:p/>
+        </p:txBody>
       </p:sp>
       <p:sp>
         <p:nvSpPr>
@@ -10347,79 +9946,44 @@
       </p:sp>
       <p:sp>
         <p:nvSpPr>
-          <p:cNvPr id="25" name="Text 23"/>
+          <p:cNvPr id="27" name="cuinotes-footer-mark"/>
           <p:cNvSpPr txBox="1"/>
           <p:nvPr/>
         </p:nvSpPr>
         <p:spPr>
           <a:xfrm>
-            <a:off x="640080" y="6446520"/>
-            <a:ext cx="8686800" cy="292608"/>
-          </a:xfrm>
-          <a:prstGeom prst="rect">
-            <a:avLst/>
-          </a:prstGeom>
-          <a:noFill/>
-          <a:ln/>
-        </p:spPr>
-        <p:txBody>
-          <a:bodyPr wrap="square" lIns="0" tIns="0" rIns="0" bIns="0" rtlCol="0" anchor="ctr"/>
-          <a:lstStyle/>
-          <a:p>
-            <a:pPr algn="l" indent="0" marL="0">
-              <a:buNone/>
-            </a:pPr>
-            <a:r>
-              <a:rPr lang="en-US" sz="900" dirty="0">
-                <a:solidFill>
-                  <a:srgbClr val="9AA3D8"/>
-                </a:solidFill>
-                <a:latin typeface="Calibri" pitchFamily="34" charset="0"/>
-                <a:ea typeface="Calibri" pitchFamily="34" charset="-122"/>
-                <a:cs typeface="Calibri" pitchFamily="34" charset="-120"/>
-              </a:rPr>
-              <a:t>Usman Akram  •  COMSATS University Islamabad</a:t>
-            </a:r>
-            <a:endParaRPr lang="en-US" sz="900" dirty="0"/>
-          </a:p>
-        </p:txBody>
-      </p:sp>
-      <p:sp>
-        <p:nvSpPr>
-          <p:cNvPr id="26" name="Text 24"/>
-          <p:cNvSpPr txBox="1"/>
-          <p:nvPr/>
-        </p:nvSpPr>
-        <p:spPr>
-          <a:xfrm>
-            <a:off x="11155680" y="6446520"/>
-            <a:ext cx="457200" cy="292608"/>
-          </a:xfrm>
-          <a:prstGeom prst="rect">
-            <a:avLst/>
-          </a:prstGeom>
-          <a:noFill/>
-          <a:ln/>
-        </p:spPr>
-        <p:txBody>
-          <a:bodyPr wrap="square" lIns="0" tIns="0" rIns="0" bIns="0" rtlCol="0" anchor="ctr"/>
-          <a:lstStyle/>
-          <a:p>
-            <a:pPr algn="r" indent="0" marL="0">
-              <a:buNone/>
-            </a:pPr>
-            <a:r>
-              <a:rPr lang="en-US" sz="900" dirty="0">
-                <a:solidFill>
-                  <a:srgbClr val="9AA3D8"/>
-                </a:solidFill>
-                <a:latin typeface="Calibri" pitchFamily="34" charset="0"/>
-                <a:ea typeface="Calibri" pitchFamily="34" charset="-122"/>
-                <a:cs typeface="Calibri" pitchFamily="34" charset="-120"/>
-              </a:rPr>
-              <a:t>23</a:t>
-            </a:r>
-            <a:endParaRPr lang="en-US" sz="900" dirty="0"/>
+            <a:off x="9951720" y="6455664"/>
+            <a:ext cx="2011680" cy="292608"/>
+          </a:xfrm>
+          <a:prstGeom prst="rect">
+            <a:avLst/>
+          </a:prstGeom>
+          <a:noFill/>
+        </p:spPr>
+        <p:txBody>
+          <a:bodyPr wrap="none" lIns="0" rIns="0" tIns="0" bIns="0">
+            <a:spAutoFit/>
+          </a:bodyPr>
+          <a:lstStyle/>
+          <a:p>
+            <a:pPr algn="r"/>
+            <a:r>
+              <a:rPr sz="1000">
+                <a:solidFill>
+                  <a:srgbClr val="8A939B"/>
+                </a:solidFill>
+                <a:hlinkClick r:id="rId3"/>
+              </a:rPr>
+              <a:t>cuinotes.com</a:t>
+            </a:r>
+            <a:r>
+              <a:rPr sz="1000">
+                <a:solidFill>
+                  <a:srgbClr val="8A939B"/>
+                </a:solidFill>
+              </a:rPr>
+              <a:t>  ·  23</a:t>
+            </a:r>
           </a:p>
         </p:txBody>
       </p:sp>
@@ -10554,6 +10118,10 @@
           </a:solidFill>
           <a:ln/>
         </p:spPr>
+        <p:txBody>
+          <a:bodyPr/>
+          <a:p/>
+        </p:txBody>
       </p:sp>
       <p:sp>
         <p:nvSpPr>
@@ -10767,79 +10335,44 @@
       </p:sp>
       <p:sp>
         <p:nvSpPr>
-          <p:cNvPr id="7" name="Text 5"/>
+          <p:cNvPr id="9" name="cuinotes-footer-mark"/>
           <p:cNvSpPr txBox="1"/>
           <p:nvPr/>
         </p:nvSpPr>
         <p:spPr>
           <a:xfrm>
-            <a:off x="640080" y="6446520"/>
-            <a:ext cx="8686800" cy="292608"/>
-          </a:xfrm>
-          <a:prstGeom prst="rect">
-            <a:avLst/>
-          </a:prstGeom>
-          <a:noFill/>
-          <a:ln/>
-        </p:spPr>
-        <p:txBody>
-          <a:bodyPr wrap="square" lIns="0" tIns="0" rIns="0" bIns="0" rtlCol="0" anchor="ctr"/>
-          <a:lstStyle/>
-          <a:p>
-            <a:pPr algn="l" indent="0" marL="0">
-              <a:buNone/>
-            </a:pPr>
-            <a:r>
-              <a:rPr lang="en-US" sz="900" dirty="0">
-                <a:solidFill>
-                  <a:srgbClr val="5D5D72"/>
-                </a:solidFill>
-                <a:latin typeface="Calibri" pitchFamily="34" charset="0"/>
-                <a:ea typeface="Calibri" pitchFamily="34" charset="-122"/>
-                <a:cs typeface="Calibri" pitchFamily="34" charset="-120"/>
-              </a:rPr>
-              <a:t>Usman Akram  •  COMSATS University Islamabad</a:t>
-            </a:r>
-            <a:endParaRPr lang="en-US" sz="900" dirty="0"/>
-          </a:p>
-        </p:txBody>
-      </p:sp>
-      <p:sp>
-        <p:nvSpPr>
-          <p:cNvPr id="8" name="Text 6"/>
-          <p:cNvSpPr txBox="1"/>
-          <p:nvPr/>
-        </p:nvSpPr>
-        <p:spPr>
-          <a:xfrm>
-            <a:off x="11155680" y="6446520"/>
-            <a:ext cx="457200" cy="292608"/>
-          </a:xfrm>
-          <a:prstGeom prst="rect">
-            <a:avLst/>
-          </a:prstGeom>
-          <a:noFill/>
-          <a:ln/>
-        </p:spPr>
-        <p:txBody>
-          <a:bodyPr wrap="square" lIns="0" tIns="0" rIns="0" bIns="0" rtlCol="0" anchor="ctr"/>
-          <a:lstStyle/>
-          <a:p>
-            <a:pPr algn="r" indent="0" marL="0">
-              <a:buNone/>
-            </a:pPr>
-            <a:r>
-              <a:rPr lang="en-US" sz="900" dirty="0">
-                <a:solidFill>
-                  <a:srgbClr val="5D5D72"/>
-                </a:solidFill>
-                <a:latin typeface="Calibri" pitchFamily="34" charset="0"/>
-                <a:ea typeface="Calibri" pitchFamily="34" charset="-122"/>
-                <a:cs typeface="Calibri" pitchFamily="34" charset="-120"/>
-              </a:rPr>
-              <a:t>3</a:t>
-            </a:r>
-            <a:endParaRPr lang="en-US" sz="900" dirty="0"/>
+            <a:off x="9951720" y="6455664"/>
+            <a:ext cx="2011680" cy="292608"/>
+          </a:xfrm>
+          <a:prstGeom prst="rect">
+            <a:avLst/>
+          </a:prstGeom>
+          <a:noFill/>
+        </p:spPr>
+        <p:txBody>
+          <a:bodyPr wrap="none" lIns="0" rIns="0" tIns="0" bIns="0">
+            <a:spAutoFit/>
+          </a:bodyPr>
+          <a:lstStyle/>
+          <a:p>
+            <a:pPr algn="r"/>
+            <a:r>
+              <a:rPr sz="1000">
+                <a:solidFill>
+                  <a:srgbClr val="8A939B"/>
+                </a:solidFill>
+                <a:hlinkClick r:id="rId3"/>
+              </a:rPr>
+              <a:t>cuinotes.com</a:t>
+            </a:r>
+            <a:r>
+              <a:rPr sz="1000">
+                <a:solidFill>
+                  <a:srgbClr val="8A939B"/>
+                </a:solidFill>
+              </a:rPr>
+              <a:t>  ·  3</a:t>
+            </a:r>
           </a:p>
         </p:txBody>
       </p:sp>
@@ -10974,6 +10507,10 @@
           </a:solidFill>
           <a:ln/>
         </p:spPr>
+        <p:txBody>
+          <a:bodyPr/>
+          <a:p/>
+        </p:txBody>
       </p:sp>
       <p:sp>
         <p:nvSpPr>
@@ -11118,79 +10655,44 @@
       </p:sp>
       <p:sp>
         <p:nvSpPr>
-          <p:cNvPr id="7" name="Text 5"/>
+          <p:cNvPr id="9" name="cuinotes-footer-mark"/>
           <p:cNvSpPr txBox="1"/>
           <p:nvPr/>
         </p:nvSpPr>
         <p:spPr>
           <a:xfrm>
-            <a:off x="640080" y="6446520"/>
-            <a:ext cx="8686800" cy="292608"/>
-          </a:xfrm>
-          <a:prstGeom prst="rect">
-            <a:avLst/>
-          </a:prstGeom>
-          <a:noFill/>
-          <a:ln/>
-        </p:spPr>
-        <p:txBody>
-          <a:bodyPr wrap="square" lIns="0" tIns="0" rIns="0" bIns="0" rtlCol="0" anchor="ctr"/>
-          <a:lstStyle/>
-          <a:p>
-            <a:pPr algn="l" indent="0" marL="0">
-              <a:buNone/>
-            </a:pPr>
-            <a:r>
-              <a:rPr lang="en-US" sz="900" dirty="0">
-                <a:solidFill>
-                  <a:srgbClr val="5D5D72"/>
-                </a:solidFill>
-                <a:latin typeface="Calibri" pitchFamily="34" charset="0"/>
-                <a:ea typeface="Calibri" pitchFamily="34" charset="-122"/>
-                <a:cs typeface="Calibri" pitchFamily="34" charset="-120"/>
-              </a:rPr>
-              <a:t>Usman Akram  •  COMSATS University Islamabad</a:t>
-            </a:r>
-            <a:endParaRPr lang="en-US" sz="900" dirty="0"/>
-          </a:p>
-        </p:txBody>
-      </p:sp>
-      <p:sp>
-        <p:nvSpPr>
-          <p:cNvPr id="8" name="Text 6"/>
-          <p:cNvSpPr txBox="1"/>
-          <p:nvPr/>
-        </p:nvSpPr>
-        <p:spPr>
-          <a:xfrm>
-            <a:off x="11155680" y="6446520"/>
-            <a:ext cx="457200" cy="292608"/>
-          </a:xfrm>
-          <a:prstGeom prst="rect">
-            <a:avLst/>
-          </a:prstGeom>
-          <a:noFill/>
-          <a:ln/>
-        </p:spPr>
-        <p:txBody>
-          <a:bodyPr wrap="square" lIns="0" tIns="0" rIns="0" bIns="0" rtlCol="0" anchor="ctr"/>
-          <a:lstStyle/>
-          <a:p>
-            <a:pPr algn="r" indent="0" marL="0">
-              <a:buNone/>
-            </a:pPr>
-            <a:r>
-              <a:rPr lang="en-US" sz="900" dirty="0">
-                <a:solidFill>
-                  <a:srgbClr val="5D5D72"/>
-                </a:solidFill>
-                <a:latin typeface="Calibri" pitchFamily="34" charset="0"/>
-                <a:ea typeface="Calibri" pitchFamily="34" charset="-122"/>
-                <a:cs typeface="Calibri" pitchFamily="34" charset="-120"/>
-              </a:rPr>
-              <a:t>4</a:t>
-            </a:r>
-            <a:endParaRPr lang="en-US" sz="900" dirty="0"/>
+            <a:off x="9951720" y="6455664"/>
+            <a:ext cx="2011680" cy="292608"/>
+          </a:xfrm>
+          <a:prstGeom prst="rect">
+            <a:avLst/>
+          </a:prstGeom>
+          <a:noFill/>
+        </p:spPr>
+        <p:txBody>
+          <a:bodyPr wrap="none" lIns="0" rIns="0" tIns="0" bIns="0">
+            <a:spAutoFit/>
+          </a:bodyPr>
+          <a:lstStyle/>
+          <a:p>
+            <a:pPr algn="r"/>
+            <a:r>
+              <a:rPr sz="1000">
+                <a:solidFill>
+                  <a:srgbClr val="8A939B"/>
+                </a:solidFill>
+                <a:hlinkClick r:id="rId3"/>
+              </a:rPr>
+              <a:t>cuinotes.com</a:t>
+            </a:r>
+            <a:r>
+              <a:rPr sz="1000">
+                <a:solidFill>
+                  <a:srgbClr val="8A939B"/>
+                </a:solidFill>
+              </a:rPr>
+              <a:t>  ·  4</a:t>
+            </a:r>
           </a:p>
         </p:txBody>
       </p:sp>
@@ -11330,6 +10832,10 @@
             <a:prstDash val="solid"/>
           </a:ln>
         </p:spPr>
+        <p:txBody>
+          <a:bodyPr/>
+          <a:p/>
+        </p:txBody>
       </p:sp>
       <p:sp>
         <p:nvSpPr>
@@ -11411,79 +10917,44 @@
       </p:sp>
       <p:sp>
         <p:nvSpPr>
-          <p:cNvPr id="7" name="Text 5"/>
+          <p:cNvPr id="9" name="cuinotes-footer-mark"/>
           <p:cNvSpPr txBox="1"/>
           <p:nvPr/>
         </p:nvSpPr>
         <p:spPr>
           <a:xfrm>
-            <a:off x="640080" y="6446520"/>
-            <a:ext cx="8686800" cy="292608"/>
-          </a:xfrm>
-          <a:prstGeom prst="rect">
-            <a:avLst/>
-          </a:prstGeom>
-          <a:noFill/>
-          <a:ln/>
-        </p:spPr>
-        <p:txBody>
-          <a:bodyPr wrap="square" lIns="0" tIns="0" rIns="0" bIns="0" rtlCol="0" anchor="ctr"/>
-          <a:lstStyle/>
-          <a:p>
-            <a:pPr algn="l" indent="0" marL="0">
-              <a:buNone/>
-            </a:pPr>
-            <a:r>
-              <a:rPr lang="en-US" sz="900" dirty="0">
-                <a:solidFill>
-                  <a:srgbClr val="5D5D72"/>
-                </a:solidFill>
-                <a:latin typeface="Calibri" pitchFamily="34" charset="0"/>
-                <a:ea typeface="Calibri" pitchFamily="34" charset="-122"/>
-                <a:cs typeface="Calibri" pitchFamily="34" charset="-120"/>
-              </a:rPr>
-              <a:t>Usman Akram  •  COMSATS University Islamabad</a:t>
-            </a:r>
-            <a:endParaRPr lang="en-US" sz="900" dirty="0"/>
-          </a:p>
-        </p:txBody>
-      </p:sp>
-      <p:sp>
-        <p:nvSpPr>
-          <p:cNvPr id="8" name="Text 6"/>
-          <p:cNvSpPr txBox="1"/>
-          <p:nvPr/>
-        </p:nvSpPr>
-        <p:spPr>
-          <a:xfrm>
-            <a:off x="11155680" y="6446520"/>
-            <a:ext cx="457200" cy="292608"/>
-          </a:xfrm>
-          <a:prstGeom prst="rect">
-            <a:avLst/>
-          </a:prstGeom>
-          <a:noFill/>
-          <a:ln/>
-        </p:spPr>
-        <p:txBody>
-          <a:bodyPr wrap="square" lIns="0" tIns="0" rIns="0" bIns="0" rtlCol="0" anchor="ctr"/>
-          <a:lstStyle/>
-          <a:p>
-            <a:pPr algn="r" indent="0" marL="0">
-              <a:buNone/>
-            </a:pPr>
-            <a:r>
-              <a:rPr lang="en-US" sz="900" dirty="0">
-                <a:solidFill>
-                  <a:srgbClr val="5D5D72"/>
-                </a:solidFill>
-                <a:latin typeface="Calibri" pitchFamily="34" charset="0"/>
-                <a:ea typeface="Calibri" pitchFamily="34" charset="-122"/>
-                <a:cs typeface="Calibri" pitchFamily="34" charset="-120"/>
-              </a:rPr>
-              <a:t>5</a:t>
-            </a:r>
-            <a:endParaRPr lang="en-US" sz="900" dirty="0"/>
+            <a:off x="9951720" y="6455664"/>
+            <a:ext cx="2011680" cy="292608"/>
+          </a:xfrm>
+          <a:prstGeom prst="rect">
+            <a:avLst/>
+          </a:prstGeom>
+          <a:noFill/>
+        </p:spPr>
+        <p:txBody>
+          <a:bodyPr wrap="none" lIns="0" rIns="0" tIns="0" bIns="0">
+            <a:spAutoFit/>
+          </a:bodyPr>
+          <a:lstStyle/>
+          <a:p>
+            <a:pPr algn="r"/>
+            <a:r>
+              <a:rPr sz="1000">
+                <a:solidFill>
+                  <a:srgbClr val="8A939B"/>
+                </a:solidFill>
+                <a:hlinkClick r:id="rId3"/>
+              </a:rPr>
+              <a:t>cuinotes.com</a:t>
+            </a:r>
+            <a:r>
+              <a:rPr sz="1000">
+                <a:solidFill>
+                  <a:srgbClr val="8A939B"/>
+                </a:solidFill>
+              </a:rPr>
+              <a:t>  ·  5</a:t>
+            </a:r>
           </a:p>
         </p:txBody>
       </p:sp>
@@ -11618,6 +11089,10 @@
           </a:solidFill>
           <a:ln/>
         </p:spPr>
+        <p:txBody>
+          <a:bodyPr/>
+          <a:p/>
+        </p:txBody>
       </p:sp>
       <p:sp>
         <p:nvSpPr>
@@ -11762,79 +11237,44 @@
       </p:sp>
       <p:sp>
         <p:nvSpPr>
-          <p:cNvPr id="7" name="Text 5"/>
+          <p:cNvPr id="9" name="cuinotes-footer-mark"/>
           <p:cNvSpPr txBox="1"/>
           <p:nvPr/>
         </p:nvSpPr>
         <p:spPr>
           <a:xfrm>
-            <a:off x="640080" y="6446520"/>
-            <a:ext cx="8686800" cy="292608"/>
-          </a:xfrm>
-          <a:prstGeom prst="rect">
-            <a:avLst/>
-          </a:prstGeom>
-          <a:noFill/>
-          <a:ln/>
-        </p:spPr>
-        <p:txBody>
-          <a:bodyPr wrap="square" lIns="0" tIns="0" rIns="0" bIns="0" rtlCol="0" anchor="ctr"/>
-          <a:lstStyle/>
-          <a:p>
-            <a:pPr algn="l" indent="0" marL="0">
-              <a:buNone/>
-            </a:pPr>
-            <a:r>
-              <a:rPr lang="en-US" sz="900" dirty="0">
-                <a:solidFill>
-                  <a:srgbClr val="5D5D72"/>
-                </a:solidFill>
-                <a:latin typeface="Calibri" pitchFamily="34" charset="0"/>
-                <a:ea typeface="Calibri" pitchFamily="34" charset="-122"/>
-                <a:cs typeface="Calibri" pitchFamily="34" charset="-120"/>
-              </a:rPr>
-              <a:t>Usman Akram  •  COMSATS University Islamabad</a:t>
-            </a:r>
-            <a:endParaRPr lang="en-US" sz="900" dirty="0"/>
-          </a:p>
-        </p:txBody>
-      </p:sp>
-      <p:sp>
-        <p:nvSpPr>
-          <p:cNvPr id="8" name="Text 6"/>
-          <p:cNvSpPr txBox="1"/>
-          <p:nvPr/>
-        </p:nvSpPr>
-        <p:spPr>
-          <a:xfrm>
-            <a:off x="11155680" y="6446520"/>
-            <a:ext cx="457200" cy="292608"/>
-          </a:xfrm>
-          <a:prstGeom prst="rect">
-            <a:avLst/>
-          </a:prstGeom>
-          <a:noFill/>
-          <a:ln/>
-        </p:spPr>
-        <p:txBody>
-          <a:bodyPr wrap="square" lIns="0" tIns="0" rIns="0" bIns="0" rtlCol="0" anchor="ctr"/>
-          <a:lstStyle/>
-          <a:p>
-            <a:pPr algn="r" indent="0" marL="0">
-              <a:buNone/>
-            </a:pPr>
-            <a:r>
-              <a:rPr lang="en-US" sz="900" dirty="0">
-                <a:solidFill>
-                  <a:srgbClr val="5D5D72"/>
-                </a:solidFill>
-                <a:latin typeface="Calibri" pitchFamily="34" charset="0"/>
-                <a:ea typeface="Calibri" pitchFamily="34" charset="-122"/>
-                <a:cs typeface="Calibri" pitchFamily="34" charset="-120"/>
-              </a:rPr>
-              <a:t>6</a:t>
-            </a:r>
-            <a:endParaRPr lang="en-US" sz="900" dirty="0"/>
+            <a:off x="9951720" y="6455664"/>
+            <a:ext cx="2011680" cy="292608"/>
+          </a:xfrm>
+          <a:prstGeom prst="rect">
+            <a:avLst/>
+          </a:prstGeom>
+          <a:noFill/>
+        </p:spPr>
+        <p:txBody>
+          <a:bodyPr wrap="none" lIns="0" rIns="0" tIns="0" bIns="0">
+            <a:spAutoFit/>
+          </a:bodyPr>
+          <a:lstStyle/>
+          <a:p>
+            <a:pPr algn="r"/>
+            <a:r>
+              <a:rPr sz="1000">
+                <a:solidFill>
+                  <a:srgbClr val="8A939B"/>
+                </a:solidFill>
+                <a:hlinkClick r:id="rId3"/>
+              </a:rPr>
+              <a:t>cuinotes.com</a:t>
+            </a:r>
+            <a:r>
+              <a:rPr sz="1000">
+                <a:solidFill>
+                  <a:srgbClr val="8A939B"/>
+                </a:solidFill>
+              </a:rPr>
+              <a:t>  ·  6</a:t>
+            </a:r>
           </a:p>
         </p:txBody>
       </p:sp>
@@ -11969,6 +11409,10 @@
           </a:solidFill>
           <a:ln/>
         </p:spPr>
+        <p:txBody>
+          <a:bodyPr/>
+          <a:p/>
+        </p:txBody>
       </p:sp>
       <p:sp>
         <p:nvSpPr>
@@ -12093,79 +11537,44 @@
       </p:sp>
       <p:sp>
         <p:nvSpPr>
-          <p:cNvPr id="7" name="Text 5"/>
+          <p:cNvPr id="9" name="cuinotes-footer-mark"/>
           <p:cNvSpPr txBox="1"/>
           <p:nvPr/>
         </p:nvSpPr>
         <p:spPr>
           <a:xfrm>
-            <a:off x="640080" y="6446520"/>
-            <a:ext cx="8686800" cy="292608"/>
-          </a:xfrm>
-          <a:prstGeom prst="rect">
-            <a:avLst/>
-          </a:prstGeom>
-          <a:noFill/>
-          <a:ln/>
-        </p:spPr>
-        <p:txBody>
-          <a:bodyPr wrap="square" lIns="0" tIns="0" rIns="0" bIns="0" rtlCol="0" anchor="ctr"/>
-          <a:lstStyle/>
-          <a:p>
-            <a:pPr algn="l" indent="0" marL="0">
-              <a:buNone/>
-            </a:pPr>
-            <a:r>
-              <a:rPr lang="en-US" sz="900" dirty="0">
-                <a:solidFill>
-                  <a:srgbClr val="5D5D72"/>
-                </a:solidFill>
-                <a:latin typeface="Calibri" pitchFamily="34" charset="0"/>
-                <a:ea typeface="Calibri" pitchFamily="34" charset="-122"/>
-                <a:cs typeface="Calibri" pitchFamily="34" charset="-120"/>
-              </a:rPr>
-              <a:t>Usman Akram  •  COMSATS University Islamabad</a:t>
-            </a:r>
-            <a:endParaRPr lang="en-US" sz="900" dirty="0"/>
-          </a:p>
-        </p:txBody>
-      </p:sp>
-      <p:sp>
-        <p:nvSpPr>
-          <p:cNvPr id="8" name="Text 6"/>
-          <p:cNvSpPr txBox="1"/>
-          <p:nvPr/>
-        </p:nvSpPr>
-        <p:spPr>
-          <a:xfrm>
-            <a:off x="11155680" y="6446520"/>
-            <a:ext cx="457200" cy="292608"/>
-          </a:xfrm>
-          <a:prstGeom prst="rect">
-            <a:avLst/>
-          </a:prstGeom>
-          <a:noFill/>
-          <a:ln/>
-        </p:spPr>
-        <p:txBody>
-          <a:bodyPr wrap="square" lIns="0" tIns="0" rIns="0" bIns="0" rtlCol="0" anchor="ctr"/>
-          <a:lstStyle/>
-          <a:p>
-            <a:pPr algn="r" indent="0" marL="0">
-              <a:buNone/>
-            </a:pPr>
-            <a:r>
-              <a:rPr lang="en-US" sz="900" dirty="0">
-                <a:solidFill>
-                  <a:srgbClr val="5D5D72"/>
-                </a:solidFill>
-                <a:latin typeface="Calibri" pitchFamily="34" charset="0"/>
-                <a:ea typeface="Calibri" pitchFamily="34" charset="-122"/>
-                <a:cs typeface="Calibri" pitchFamily="34" charset="-120"/>
-              </a:rPr>
-              <a:t>7</a:t>
-            </a:r>
-            <a:endParaRPr lang="en-US" sz="900" dirty="0"/>
+            <a:off x="9951720" y="6455664"/>
+            <a:ext cx="2011680" cy="292608"/>
+          </a:xfrm>
+          <a:prstGeom prst="rect">
+            <a:avLst/>
+          </a:prstGeom>
+          <a:noFill/>
+        </p:spPr>
+        <p:txBody>
+          <a:bodyPr wrap="none" lIns="0" rIns="0" tIns="0" bIns="0">
+            <a:spAutoFit/>
+          </a:bodyPr>
+          <a:lstStyle/>
+          <a:p>
+            <a:pPr algn="r"/>
+            <a:r>
+              <a:rPr sz="1000">
+                <a:solidFill>
+                  <a:srgbClr val="8A939B"/>
+                </a:solidFill>
+                <a:hlinkClick r:id="rId3"/>
+              </a:rPr>
+              <a:t>cuinotes.com</a:t>
+            </a:r>
+            <a:r>
+              <a:rPr sz="1000">
+                <a:solidFill>
+                  <a:srgbClr val="8A939B"/>
+                </a:solidFill>
+              </a:rPr>
+              <a:t>  ·  7</a:t>
+            </a:r>
           </a:p>
         </p:txBody>
       </p:sp>
@@ -12300,6 +11709,10 @@
           </a:solidFill>
           <a:ln/>
         </p:spPr>
+        <p:txBody>
+          <a:bodyPr/>
+          <a:p/>
+        </p:txBody>
       </p:sp>
       <p:sp>
         <p:nvSpPr>
@@ -12424,79 +11837,44 @@
       </p:sp>
       <p:sp>
         <p:nvSpPr>
-          <p:cNvPr id="7" name="Text 5"/>
+          <p:cNvPr id="9" name="cuinotes-footer-mark"/>
           <p:cNvSpPr txBox="1"/>
           <p:nvPr/>
         </p:nvSpPr>
         <p:spPr>
           <a:xfrm>
-            <a:off x="640080" y="6446520"/>
-            <a:ext cx="8686800" cy="292608"/>
-          </a:xfrm>
-          <a:prstGeom prst="rect">
-            <a:avLst/>
-          </a:prstGeom>
-          <a:noFill/>
-          <a:ln/>
-        </p:spPr>
-        <p:txBody>
-          <a:bodyPr wrap="square" lIns="0" tIns="0" rIns="0" bIns="0" rtlCol="0" anchor="ctr"/>
-          <a:lstStyle/>
-          <a:p>
-            <a:pPr algn="l" indent="0" marL="0">
-              <a:buNone/>
-            </a:pPr>
-            <a:r>
-              <a:rPr lang="en-US" sz="900" dirty="0">
-                <a:solidFill>
-                  <a:srgbClr val="5D5D72"/>
-                </a:solidFill>
-                <a:latin typeface="Calibri" pitchFamily="34" charset="0"/>
-                <a:ea typeface="Calibri" pitchFamily="34" charset="-122"/>
-                <a:cs typeface="Calibri" pitchFamily="34" charset="-120"/>
-              </a:rPr>
-              <a:t>Usman Akram  •  COMSATS University Islamabad</a:t>
-            </a:r>
-            <a:endParaRPr lang="en-US" sz="900" dirty="0"/>
-          </a:p>
-        </p:txBody>
-      </p:sp>
-      <p:sp>
-        <p:nvSpPr>
-          <p:cNvPr id="8" name="Text 6"/>
-          <p:cNvSpPr txBox="1"/>
-          <p:nvPr/>
-        </p:nvSpPr>
-        <p:spPr>
-          <a:xfrm>
-            <a:off x="11155680" y="6446520"/>
-            <a:ext cx="457200" cy="292608"/>
-          </a:xfrm>
-          <a:prstGeom prst="rect">
-            <a:avLst/>
-          </a:prstGeom>
-          <a:noFill/>
-          <a:ln/>
-        </p:spPr>
-        <p:txBody>
-          <a:bodyPr wrap="square" lIns="0" tIns="0" rIns="0" bIns="0" rtlCol="0" anchor="ctr"/>
-          <a:lstStyle/>
-          <a:p>
-            <a:pPr algn="r" indent="0" marL="0">
-              <a:buNone/>
-            </a:pPr>
-            <a:r>
-              <a:rPr lang="en-US" sz="900" dirty="0">
-                <a:solidFill>
-                  <a:srgbClr val="5D5D72"/>
-                </a:solidFill>
-                <a:latin typeface="Calibri" pitchFamily="34" charset="0"/>
-                <a:ea typeface="Calibri" pitchFamily="34" charset="-122"/>
-                <a:cs typeface="Calibri" pitchFamily="34" charset="-120"/>
-              </a:rPr>
-              <a:t>8</a:t>
-            </a:r>
-            <a:endParaRPr lang="en-US" sz="900" dirty="0"/>
+            <a:off x="9951720" y="6455664"/>
+            <a:ext cx="2011680" cy="292608"/>
+          </a:xfrm>
+          <a:prstGeom prst="rect">
+            <a:avLst/>
+          </a:prstGeom>
+          <a:noFill/>
+        </p:spPr>
+        <p:txBody>
+          <a:bodyPr wrap="none" lIns="0" rIns="0" tIns="0" bIns="0">
+            <a:spAutoFit/>
+          </a:bodyPr>
+          <a:lstStyle/>
+          <a:p>
+            <a:pPr algn="r"/>
+            <a:r>
+              <a:rPr sz="1000">
+                <a:solidFill>
+                  <a:srgbClr val="8A939B"/>
+                </a:solidFill>
+                <a:hlinkClick r:id="rId3"/>
+              </a:rPr>
+              <a:t>cuinotes.com</a:t>
+            </a:r>
+            <a:r>
+              <a:rPr sz="1000">
+                <a:solidFill>
+                  <a:srgbClr val="8A939B"/>
+                </a:solidFill>
+              </a:rPr>
+              <a:t>  ·  8</a:t>
+            </a:r>
           </a:p>
         </p:txBody>
       </p:sp>
@@ -13740,79 +13118,44 @@
       </p:graphicFrame>
       <p:sp>
         <p:nvSpPr>
-          <p:cNvPr id="5" name="Text 2"/>
+          <p:cNvPr id="11" name="cuinotes-footer-mark"/>
           <p:cNvSpPr txBox="1"/>
           <p:nvPr/>
         </p:nvSpPr>
         <p:spPr>
           <a:xfrm>
-            <a:off x="640080" y="6446520"/>
-            <a:ext cx="8686800" cy="292608"/>
-          </a:xfrm>
-          <a:prstGeom prst="rect">
-            <a:avLst/>
-          </a:prstGeom>
-          <a:noFill/>
-          <a:ln/>
-        </p:spPr>
-        <p:txBody>
-          <a:bodyPr wrap="square" lIns="0" tIns="0" rIns="0" bIns="0" rtlCol="0" anchor="ctr"/>
-          <a:lstStyle/>
-          <a:p>
-            <a:pPr algn="l" indent="0" marL="0">
-              <a:buNone/>
-            </a:pPr>
-            <a:r>
-              <a:rPr lang="en-US" sz="900" dirty="0">
-                <a:solidFill>
-                  <a:srgbClr val="5D5D72"/>
-                </a:solidFill>
-                <a:latin typeface="Calibri" pitchFamily="34" charset="0"/>
-                <a:ea typeface="Calibri" pitchFamily="34" charset="-122"/>
-                <a:cs typeface="Calibri" pitchFamily="34" charset="-120"/>
-              </a:rPr>
-              <a:t>Usman Akram  •  COMSATS University Islamabad</a:t>
-            </a:r>
-            <a:endParaRPr lang="en-US" sz="900" dirty="0"/>
-          </a:p>
-        </p:txBody>
-      </p:sp>
-      <p:sp>
-        <p:nvSpPr>
-          <p:cNvPr id="6" name="Text 3"/>
-          <p:cNvSpPr txBox="1"/>
-          <p:nvPr/>
-        </p:nvSpPr>
-        <p:spPr>
-          <a:xfrm>
-            <a:off x="11155680" y="6446520"/>
-            <a:ext cx="457200" cy="292608"/>
-          </a:xfrm>
-          <a:prstGeom prst="rect">
-            <a:avLst/>
-          </a:prstGeom>
-          <a:noFill/>
-          <a:ln/>
-        </p:spPr>
-        <p:txBody>
-          <a:bodyPr wrap="square" lIns="0" tIns="0" rIns="0" bIns="0" rtlCol="0" anchor="ctr"/>
-          <a:lstStyle/>
-          <a:p>
-            <a:pPr algn="r" indent="0" marL="0">
-              <a:buNone/>
-            </a:pPr>
-            <a:r>
-              <a:rPr lang="en-US" sz="900" dirty="0">
-                <a:solidFill>
-                  <a:srgbClr val="5D5D72"/>
-                </a:solidFill>
-                <a:latin typeface="Calibri" pitchFamily="34" charset="0"/>
-                <a:ea typeface="Calibri" pitchFamily="34" charset="-122"/>
-                <a:cs typeface="Calibri" pitchFamily="34" charset="-120"/>
-              </a:rPr>
-              <a:t>9</a:t>
-            </a:r>
-            <a:endParaRPr lang="en-US" sz="900" dirty="0"/>
+            <a:off x="9951720" y="6455664"/>
+            <a:ext cx="2011680" cy="292608"/>
+          </a:xfrm>
+          <a:prstGeom prst="rect">
+            <a:avLst/>
+          </a:prstGeom>
+          <a:noFill/>
+        </p:spPr>
+        <p:txBody>
+          <a:bodyPr wrap="none" lIns="0" rIns="0" tIns="0" bIns="0">
+            <a:spAutoFit/>
+          </a:bodyPr>
+          <a:lstStyle/>
+          <a:p>
+            <a:pPr algn="r"/>
+            <a:r>
+              <a:rPr sz="1000">
+                <a:solidFill>
+                  <a:srgbClr val="8A939B"/>
+                </a:solidFill>
+                <a:hlinkClick r:id="rId3"/>
+              </a:rPr>
+              <a:t>cuinotes.com</a:t>
+            </a:r>
+            <a:r>
+              <a:rPr sz="1000">
+                <a:solidFill>
+                  <a:srgbClr val="8A939B"/>
+                </a:solidFill>
+              </a:rPr>
+              <a:t>  ·  9</a:t>
+            </a:r>
           </a:p>
         </p:txBody>
       </p:sp>

--- a/slides/CSC336-Lecture-12-Array-Methods-and-Processing.pptx
+++ b/slides/CSC336-Lecture-12-Array-Methods-and-Processing.pptx
@@ -3182,9 +3182,13 @@
             </a:avLst>
           </a:prstGeom>
           <a:solidFill>
-            <a:srgbClr val="1E1E4C"/>
+            <a:srgbClr val="F7F8F9"/>
           </a:solidFill>
-          <a:ln/>
+          <a:ln w="9525">
+            <a:solidFill>
+              <a:srgbClr val="D0D5DD"/>
+            </a:solidFill>
+          </a:ln>
         </p:spPr>
         <p:txBody>
           <a:bodyPr/>
@@ -3221,7 +3225,7 @@
             <a:r>
               <a:rPr lang="en-US" sz="1400" dirty="0">
                 <a:solidFill>
-                  <a:srgbClr val="C9D3F5"/>
+                  <a:srgbClr val="1F2429"/>
                 </a:solidFill>
                 <a:latin typeface="Courier New" pitchFamily="34" charset="0"/>
                 <a:ea typeface="Courier New" pitchFamily="34" charset="-122"/>
@@ -3241,7 +3245,7 @@
             <a:r>
               <a:rPr lang="en-US" sz="1400" dirty="0">
                 <a:solidFill>
-                  <a:srgbClr val="C9D3F5"/>
+                  <a:srgbClr val="1F2429"/>
                 </a:solidFill>
                 <a:latin typeface="Courier New" pitchFamily="34" charset="0"/>
                 <a:ea typeface="Courier New" pitchFamily="34" charset="-122"/>
@@ -3261,7 +3265,7 @@
             <a:r>
               <a:rPr lang="en-US" sz="1400" dirty="0">
                 <a:solidFill>
-                  <a:srgbClr val="C9D3F5"/>
+                  <a:srgbClr val="1F2429"/>
                 </a:solidFill>
                 <a:latin typeface="Courier New" pitchFamily="34" charset="0"/>
                 <a:ea typeface="Courier New" pitchFamily="34" charset="-122"/>
@@ -3281,7 +3285,7 @@
             <a:r>
               <a:rPr lang="en-US" sz="1400" dirty="0">
                 <a:solidFill>
-                  <a:srgbClr val="C9D3F5"/>
+                  <a:srgbClr val="1F2429"/>
                 </a:solidFill>
                 <a:latin typeface="Courier New" pitchFamily="34" charset="0"/>
                 <a:ea typeface="Courier New" pitchFamily="34" charset="-122"/>
@@ -3301,7 +3305,7 @@
             <a:r>
               <a:rPr lang="en-US" sz="1400" dirty="0">
                 <a:solidFill>
-                  <a:srgbClr val="C9D3F5"/>
+                  <a:srgbClr val="1F2429"/>
                 </a:solidFill>
                 <a:latin typeface="Courier New" pitchFamily="34" charset="0"/>
                 <a:ea typeface="Courier New" pitchFamily="34" charset="-122"/>
@@ -3321,7 +3325,7 @@
             <a:r>
               <a:rPr lang="en-US" sz="1400" dirty="0">
                 <a:solidFill>
-                  <a:srgbClr val="C9D3F5"/>
+                  <a:srgbClr val="1F2429"/>
                 </a:solidFill>
                 <a:latin typeface="Courier New" pitchFamily="34" charset="0"/>
                 <a:ea typeface="Courier New" pitchFamily="34" charset="-122"/>
@@ -3542,9 +3546,13 @@
             </a:avLst>
           </a:prstGeom>
           <a:solidFill>
-            <a:srgbClr val="1E1E4C"/>
+            <a:srgbClr val="F7F8F9"/>
           </a:solidFill>
-          <a:ln/>
+          <a:ln w="9525">
+            <a:solidFill>
+              <a:srgbClr val="D0D5DD"/>
+            </a:solidFill>
+          </a:ln>
         </p:spPr>
         <p:txBody>
           <a:bodyPr/>
@@ -3581,7 +3589,7 @@
             <a:r>
               <a:rPr lang="en-US" sz="1400" dirty="0">
                 <a:solidFill>
-                  <a:srgbClr val="C9D3F5"/>
+                  <a:srgbClr val="1F2429"/>
                 </a:solidFill>
                 <a:latin typeface="Courier New" pitchFamily="34" charset="0"/>
                 <a:ea typeface="Courier New" pitchFamily="34" charset="-122"/>
@@ -3601,7 +3609,7 @@
             <a:r>
               <a:rPr lang="en-US" sz="1400" dirty="0">
                 <a:solidFill>
-                  <a:srgbClr val="C9D3F5"/>
+                  <a:srgbClr val="1F2429"/>
                 </a:solidFill>
                 <a:latin typeface="Courier New" pitchFamily="34" charset="0"/>
                 <a:ea typeface="Courier New" pitchFamily="34" charset="-122"/>
@@ -3621,7 +3629,7 @@
             <a:r>
               <a:rPr lang="en-US" sz="1400" dirty="0">
                 <a:solidFill>
-                  <a:srgbClr val="C9D3F5"/>
+                  <a:srgbClr val="1F2429"/>
                 </a:solidFill>
                 <a:latin typeface="Courier New" pitchFamily="34" charset="0"/>
                 <a:ea typeface="Courier New" pitchFamily="34" charset="-122"/>
@@ -3641,7 +3649,7 @@
             <a:r>
               <a:rPr lang="en-US" sz="1400" dirty="0">
                 <a:solidFill>
-                  <a:srgbClr val="C9D3F5"/>
+                  <a:srgbClr val="1F2429"/>
                 </a:solidFill>
                 <a:latin typeface="Courier New" pitchFamily="34" charset="0"/>
                 <a:ea typeface="Courier New" pitchFamily="34" charset="-122"/>
@@ -3661,7 +3669,7 @@
             <a:r>
               <a:rPr lang="en-US" sz="1400" dirty="0">
                 <a:solidFill>
-                  <a:srgbClr val="C9D3F5"/>
+                  <a:srgbClr val="1F2429"/>
                 </a:solidFill>
                 <a:latin typeface="Courier New" pitchFamily="34" charset="0"/>
                 <a:ea typeface="Courier New" pitchFamily="34" charset="-122"/>
@@ -3690,7 +3698,7 @@
             <a:r>
               <a:rPr lang="en-US" sz="1400" dirty="0">
                 <a:solidFill>
-                  <a:srgbClr val="C9D3F5"/>
+                  <a:srgbClr val="1F2429"/>
                 </a:solidFill>
                 <a:latin typeface="Courier New" pitchFamily="34" charset="0"/>
                 <a:ea typeface="Courier New" pitchFamily="34" charset="-122"/>
@@ -3710,7 +3718,7 @@
             <a:r>
               <a:rPr lang="en-US" sz="1400" dirty="0">
                 <a:solidFill>
-                  <a:srgbClr val="C9D3F5"/>
+                  <a:srgbClr val="1F2429"/>
                 </a:solidFill>
                 <a:latin typeface="Courier New" pitchFamily="34" charset="0"/>
                 <a:ea typeface="Courier New" pitchFamily="34" charset="-122"/>
@@ -3730,7 +3738,7 @@
             <a:r>
               <a:rPr lang="en-US" sz="1400" dirty="0">
                 <a:solidFill>
-                  <a:srgbClr val="C9D3F5"/>
+                  <a:srgbClr val="1F2429"/>
                 </a:solidFill>
                 <a:latin typeface="Courier New" pitchFamily="34" charset="0"/>
                 <a:ea typeface="Courier New" pitchFamily="34" charset="-122"/>
@@ -3951,9 +3959,13 @@
             </a:avLst>
           </a:prstGeom>
           <a:solidFill>
-            <a:srgbClr val="1E1E4C"/>
+            <a:srgbClr val="F7F8F9"/>
           </a:solidFill>
-          <a:ln/>
+          <a:ln w="9525">
+            <a:solidFill>
+              <a:srgbClr val="D0D5DD"/>
+            </a:solidFill>
+          </a:ln>
         </p:spPr>
         <p:txBody>
           <a:bodyPr/>
@@ -3990,7 +4002,7 @@
             <a:r>
               <a:rPr lang="en-US" sz="1400" dirty="0">
                 <a:solidFill>
-                  <a:srgbClr val="C9D3F5"/>
+                  <a:srgbClr val="1F2429"/>
                 </a:solidFill>
                 <a:latin typeface="Courier New" pitchFamily="34" charset="0"/>
                 <a:ea typeface="Courier New" pitchFamily="34" charset="-122"/>
@@ -4010,7 +4022,7 @@
             <a:r>
               <a:rPr lang="en-US" sz="1400" dirty="0">
                 <a:solidFill>
-                  <a:srgbClr val="C9D3F5"/>
+                  <a:srgbClr val="1F2429"/>
                 </a:solidFill>
                 <a:latin typeface="Courier New" pitchFamily="34" charset="0"/>
                 <a:ea typeface="Courier New" pitchFamily="34" charset="-122"/>
@@ -4030,7 +4042,7 @@
             <a:r>
               <a:rPr lang="en-US" sz="1400" dirty="0">
                 <a:solidFill>
-                  <a:srgbClr val="C9D3F5"/>
+                  <a:srgbClr val="1F2429"/>
                 </a:solidFill>
                 <a:latin typeface="Courier New" pitchFamily="34" charset="0"/>
                 <a:ea typeface="Courier New" pitchFamily="34" charset="-122"/>
@@ -4050,7 +4062,7 @@
             <a:r>
               <a:rPr lang="en-US" sz="1400" dirty="0">
                 <a:solidFill>
-                  <a:srgbClr val="C9D3F5"/>
+                  <a:srgbClr val="1F2429"/>
                 </a:solidFill>
                 <a:latin typeface="Courier New" pitchFamily="34" charset="0"/>
                 <a:ea typeface="Courier New" pitchFamily="34" charset="-122"/>
@@ -4263,7 +4275,7 @@
         <p:spPr>
           <a:xfrm>
             <a:off x="640080" y="1965960"/>
-            <a:ext cx="10911535" cy="1737360"/>
+            <a:ext cx="10911535" cy="3657600"/>
           </a:xfrm>
           <a:prstGeom prst="roundRect">
             <a:avLst>
@@ -4294,7 +4306,7 @@
         <p:spPr>
           <a:xfrm>
             <a:off x="868680" y="2103120"/>
-            <a:ext cx="10454335" cy="274320"/>
+            <a:ext cx="10454335" cy="400000"/>
           </a:xfrm>
           <a:prstGeom prst="rect">
             <a:avLst/>
@@ -4310,7 +4322,7 @@
               <a:buNone/>
             </a:pPr>
             <a:r>
-              <a:rPr lang="en-US" sz="1000" b="1" spc="200" kern="0" dirty="0">
+              <a:rPr lang="en-US" sz="1800" b="1" spc="200" kern="0" dirty="0">
                 <a:solidFill>
                   <a:srgbClr val="8A3A12"/>
                 </a:solidFill>
@@ -4320,7 +4332,7 @@
               </a:rPr>
               <a:t>WARNING</a:t>
             </a:r>
-            <a:endParaRPr lang="en-US" sz="1000" dirty="0"/>
+            <a:endParaRPr lang="en-US" sz="1800" dirty="0"/>
           </a:p>
         </p:txBody>
       </p:sp>
@@ -4332,8 +4344,8 @@
         </p:nvSpPr>
         <p:spPr>
           <a:xfrm>
-            <a:off x="868680" y="2404872"/>
-            <a:ext cx="10454335" cy="1143000"/>
+            <a:off x="868680" y="2795960"/>
+            <a:ext cx="10454335" cy="2500000"/>
           </a:xfrm>
           <a:prstGeom prst="rect">
             <a:avLst/>
@@ -4342,14 +4354,14 @@
           <a:ln/>
         </p:spPr>
         <p:txBody>
-          <a:bodyPr wrap="square" lIns="0" tIns="0" rIns="0" bIns="0" rtlCol="0" anchor="t"/>
+          <a:bodyPr wrap="square" lIns="0" tIns="0" rIns="0" bIns="0" rtlCol="0" anchor="ctr"/>
           <a:lstStyle/>
           <a:p>
             <a:pPr indent="0" marL="0">
               <a:buNone/>
             </a:pPr>
             <a:r>
-              <a:rPr lang="en-US" sz="1250" dirty="0">
+              <a:rPr lang="en-US" sz="2800" dirty="0">
                 <a:solidFill>
                   <a:srgbClr val="26262F"/>
                 </a:solidFill>
@@ -4359,7 +4371,7 @@
               </a:rPr>
               <a:t>Unlike map and filter, sort (and also reverse, push, pop, splice) change the original array instead of returning a new one. If you need to keep the original order intact, sort a copy: [...nums].sort((a, b) =&gt; a - b).</a:t>
             </a:r>
-            <a:endParaRPr lang="en-US" sz="1250" dirty="0"/>
+            <a:endParaRPr lang="en-US" sz="2800" dirty="0"/>
           </a:p>
         </p:txBody>
       </p:sp>
@@ -4533,9 +4545,13 @@
             </a:avLst>
           </a:prstGeom>
           <a:solidFill>
-            <a:srgbClr val="1E1E4C"/>
+            <a:srgbClr val="F7F8F9"/>
           </a:solidFill>
-          <a:ln/>
+          <a:ln w="9525">
+            <a:solidFill>
+              <a:srgbClr val="D0D5DD"/>
+            </a:solidFill>
+          </a:ln>
         </p:spPr>
         <p:txBody>
           <a:bodyPr/>
@@ -4572,7 +4588,7 @@
             <a:r>
               <a:rPr lang="en-US" sz="1400" dirty="0">
                 <a:solidFill>
-                  <a:srgbClr val="C9D3F5"/>
+                  <a:srgbClr val="1F2429"/>
                 </a:solidFill>
                 <a:latin typeface="Courier New" pitchFamily="34" charset="0"/>
                 <a:ea typeface="Courier New" pitchFamily="34" charset="-122"/>
@@ -4592,7 +4608,7 @@
             <a:r>
               <a:rPr lang="en-US" sz="1400" dirty="0">
                 <a:solidFill>
-                  <a:srgbClr val="C9D3F5"/>
+                  <a:srgbClr val="1F2429"/>
                 </a:solidFill>
                 <a:latin typeface="Courier New" pitchFamily="34" charset="0"/>
                 <a:ea typeface="Courier New" pitchFamily="34" charset="-122"/>
@@ -4612,7 +4628,7 @@
             <a:r>
               <a:rPr lang="en-US" sz="1400" dirty="0">
                 <a:solidFill>
-                  <a:srgbClr val="C9D3F5"/>
+                  <a:srgbClr val="1F2429"/>
                 </a:solidFill>
                 <a:latin typeface="Courier New" pitchFamily="34" charset="0"/>
                 <a:ea typeface="Courier New" pitchFamily="34" charset="-122"/>
@@ -4632,7 +4648,7 @@
             <a:r>
               <a:rPr lang="en-US" sz="1400" dirty="0">
                 <a:solidFill>
-                  <a:srgbClr val="C9D3F5"/>
+                  <a:srgbClr val="1F2429"/>
                 </a:solidFill>
                 <a:latin typeface="Courier New" pitchFamily="34" charset="0"/>
                 <a:ea typeface="Courier New" pitchFamily="34" charset="-122"/>
@@ -4652,7 +4668,7 @@
             <a:r>
               <a:rPr lang="en-US" sz="1400" dirty="0">
                 <a:solidFill>
-                  <a:srgbClr val="C9D3F5"/>
+                  <a:srgbClr val="1F2429"/>
                 </a:solidFill>
                 <a:latin typeface="Courier New" pitchFamily="34" charset="0"/>
                 <a:ea typeface="Courier New" pitchFamily="34" charset="-122"/>
@@ -4672,7 +4688,7 @@
             <a:r>
               <a:rPr lang="en-US" sz="1400" dirty="0">
                 <a:solidFill>
-                  <a:srgbClr val="C9D3F5"/>
+                  <a:srgbClr val="1F2429"/>
                 </a:solidFill>
                 <a:latin typeface="Courier New" pitchFamily="34" charset="0"/>
                 <a:ea typeface="Courier New" pitchFamily="34" charset="-122"/>
@@ -4692,7 +4708,7 @@
             <a:r>
               <a:rPr lang="en-US" sz="1400" dirty="0">
                 <a:solidFill>
-                  <a:srgbClr val="C9D3F5"/>
+                  <a:srgbClr val="1F2429"/>
                 </a:solidFill>
                 <a:latin typeface="Courier New" pitchFamily="34" charset="0"/>
                 <a:ea typeface="Courier New" pitchFamily="34" charset="-122"/>
@@ -4874,9 +4890,13 @@
             </a:avLst>
           </a:prstGeom>
           <a:solidFill>
-            <a:srgbClr val="1E1E4C"/>
+            <a:srgbClr val="F7F8F9"/>
           </a:solidFill>
-          <a:ln/>
+          <a:ln w="9525">
+            <a:solidFill>
+              <a:srgbClr val="D0D5DD"/>
+            </a:solidFill>
+          </a:ln>
         </p:spPr>
         <p:txBody>
           <a:bodyPr/>
@@ -4913,7 +4933,7 @@
             <a:r>
               <a:rPr lang="en-US" sz="1400" dirty="0">
                 <a:solidFill>
-                  <a:srgbClr val="C9D3F5"/>
+                  <a:srgbClr val="1F2429"/>
                 </a:solidFill>
                 <a:latin typeface="Courier New" pitchFamily="34" charset="0"/>
                 <a:ea typeface="Courier New" pitchFamily="34" charset="-122"/>
@@ -4933,7 +4953,7 @@
             <a:r>
               <a:rPr lang="en-US" sz="1400" dirty="0">
                 <a:solidFill>
-                  <a:srgbClr val="C9D3F5"/>
+                  <a:srgbClr val="1F2429"/>
                 </a:solidFill>
                 <a:latin typeface="Courier New" pitchFamily="34" charset="0"/>
                 <a:ea typeface="Courier New" pitchFamily="34" charset="-122"/>
@@ -4953,7 +4973,7 @@
             <a:r>
               <a:rPr lang="en-US" sz="1400" dirty="0">
                 <a:solidFill>
-                  <a:srgbClr val="C9D3F5"/>
+                  <a:srgbClr val="1F2429"/>
                 </a:solidFill>
                 <a:latin typeface="Courier New" pitchFamily="34" charset="0"/>
                 <a:ea typeface="Courier New" pitchFamily="34" charset="-122"/>
@@ -4973,7 +4993,7 @@
             <a:r>
               <a:rPr lang="en-US" sz="1400" dirty="0">
                 <a:solidFill>
-                  <a:srgbClr val="C9D3F5"/>
+                  <a:srgbClr val="1F2429"/>
                 </a:solidFill>
                 <a:latin typeface="Courier New" pitchFamily="34" charset="0"/>
                 <a:ea typeface="Courier New" pitchFamily="34" charset="-122"/>
@@ -5002,7 +5022,7 @@
             <a:r>
               <a:rPr lang="en-US" sz="1400" dirty="0">
                 <a:solidFill>
-                  <a:srgbClr val="C9D3F5"/>
+                  <a:srgbClr val="1F2429"/>
                 </a:solidFill>
                 <a:latin typeface="Courier New" pitchFamily="34" charset="0"/>
                 <a:ea typeface="Courier New" pitchFamily="34" charset="-122"/>
@@ -5022,7 +5042,7 @@
             <a:r>
               <a:rPr lang="en-US" sz="1400" dirty="0">
                 <a:solidFill>
-                  <a:srgbClr val="C9D3F5"/>
+                  <a:srgbClr val="1F2429"/>
                 </a:solidFill>
                 <a:latin typeface="Courier New" pitchFamily="34" charset="0"/>
                 <a:ea typeface="Courier New" pitchFamily="34" charset="-122"/>
@@ -5204,9 +5224,13 @@
             </a:avLst>
           </a:prstGeom>
           <a:solidFill>
-            <a:srgbClr val="1E1E4C"/>
+            <a:srgbClr val="F7F8F9"/>
           </a:solidFill>
-          <a:ln/>
+          <a:ln w="9525">
+            <a:solidFill>
+              <a:srgbClr val="D0D5DD"/>
+            </a:solidFill>
+          </a:ln>
         </p:spPr>
         <p:txBody>
           <a:bodyPr/>
@@ -5243,7 +5267,7 @@
             <a:r>
               <a:rPr lang="en-US" sz="1400" dirty="0">
                 <a:solidFill>
-                  <a:srgbClr val="C9D3F5"/>
+                  <a:srgbClr val="1F2429"/>
                 </a:solidFill>
                 <a:latin typeface="Courier New" pitchFamily="34" charset="0"/>
                 <a:ea typeface="Courier New" pitchFamily="34" charset="-122"/>
@@ -5263,7 +5287,7 @@
             <a:r>
               <a:rPr lang="en-US" sz="1400" dirty="0">
                 <a:solidFill>
-                  <a:srgbClr val="C9D3F5"/>
+                  <a:srgbClr val="1F2429"/>
                 </a:solidFill>
                 <a:latin typeface="Courier New" pitchFamily="34" charset="0"/>
                 <a:ea typeface="Courier New" pitchFamily="34" charset="-122"/>
@@ -5283,7 +5307,7 @@
             <a:r>
               <a:rPr lang="en-US" sz="1400" dirty="0">
                 <a:solidFill>
-                  <a:srgbClr val="C9D3F5"/>
+                  <a:srgbClr val="1F2429"/>
                 </a:solidFill>
                 <a:latin typeface="Courier New" pitchFamily="34" charset="0"/>
                 <a:ea typeface="Courier New" pitchFamily="34" charset="-122"/>
@@ -5303,7 +5327,7 @@
             <a:r>
               <a:rPr lang="en-US" sz="1400" dirty="0">
                 <a:solidFill>
-                  <a:srgbClr val="C9D3F5"/>
+                  <a:srgbClr val="1F2429"/>
                 </a:solidFill>
                 <a:latin typeface="Courier New" pitchFamily="34" charset="0"/>
                 <a:ea typeface="Courier New" pitchFamily="34" charset="-122"/>
@@ -5323,7 +5347,7 @@
             <a:r>
               <a:rPr lang="en-US" sz="1400" dirty="0">
                 <a:solidFill>
-                  <a:srgbClr val="C9D3F5"/>
+                  <a:srgbClr val="1F2429"/>
                 </a:solidFill>
                 <a:latin typeface="Courier New" pitchFamily="34" charset="0"/>
                 <a:ea typeface="Courier New" pitchFamily="34" charset="-122"/>
@@ -5352,7 +5376,7 @@
             <a:r>
               <a:rPr lang="en-US" sz="1400" dirty="0">
                 <a:solidFill>
-                  <a:srgbClr val="C9D3F5"/>
+                  <a:srgbClr val="1F2429"/>
                 </a:solidFill>
                 <a:latin typeface="Courier New" pitchFamily="34" charset="0"/>
                 <a:ea typeface="Courier New" pitchFamily="34" charset="-122"/>
@@ -5372,7 +5396,7 @@
             <a:r>
               <a:rPr lang="en-US" sz="1400" dirty="0">
                 <a:solidFill>
-                  <a:srgbClr val="C9D3F5"/>
+                  <a:srgbClr val="1F2429"/>
                 </a:solidFill>
                 <a:latin typeface="Courier New" pitchFamily="34" charset="0"/>
                 <a:ea typeface="Courier New" pitchFamily="34" charset="-122"/>
@@ -5392,7 +5416,7 @@
             <a:r>
               <a:rPr lang="en-US" sz="1400" dirty="0">
                 <a:solidFill>
-                  <a:srgbClr val="C9D3F5"/>
+                  <a:srgbClr val="1F2429"/>
                 </a:solidFill>
                 <a:latin typeface="Courier New" pitchFamily="34" charset="0"/>
                 <a:ea typeface="Courier New" pitchFamily="34" charset="-122"/>
@@ -5412,7 +5436,7 @@
             <a:r>
               <a:rPr lang="en-US" sz="1400" dirty="0">
                 <a:solidFill>
-                  <a:srgbClr val="C9D3F5"/>
+                  <a:srgbClr val="1F2429"/>
                 </a:solidFill>
                 <a:latin typeface="Courier New" pitchFamily="34" charset="0"/>
                 <a:ea typeface="Courier New" pitchFamily="34" charset="-122"/>
@@ -6280,7 +6304,7 @@
         <p:spPr>
           <a:xfrm>
             <a:off x="640080" y="1965960"/>
-            <a:ext cx="10911535" cy="1554480"/>
+            <a:ext cx="10911535" cy="3657600"/>
           </a:xfrm>
           <a:prstGeom prst="roundRect">
             <a:avLst>
@@ -6311,7 +6335,7 @@
         <p:spPr>
           <a:xfrm>
             <a:off x="868680" y="2103120"/>
-            <a:ext cx="10454335" cy="274320"/>
+            <a:ext cx="10454335" cy="400000"/>
           </a:xfrm>
           <a:prstGeom prst="rect">
             <a:avLst/>
@@ -6327,7 +6351,7 @@
               <a:buNone/>
             </a:pPr>
             <a:r>
-              <a:rPr lang="en-US" sz="1000" b="1" spc="200" kern="0" dirty="0">
+              <a:rPr lang="en-US" sz="1800" b="1" spc="200" kern="0" dirty="0">
                 <a:solidFill>
                   <a:srgbClr val="1F7A46"/>
                 </a:solidFill>
@@ -6337,7 +6361,7 @@
               </a:rPr>
               <a:t>TIP</a:t>
             </a:r>
-            <a:endParaRPr lang="en-US" sz="1000" dirty="0"/>
+            <a:endParaRPr lang="en-US" sz="1800" dirty="0"/>
           </a:p>
         </p:txBody>
       </p:sp>
@@ -6349,8 +6373,8 @@
         </p:nvSpPr>
         <p:spPr>
           <a:xfrm>
-            <a:off x="868680" y="2404872"/>
-            <a:ext cx="10454335" cy="960120"/>
+            <a:off x="868680" y="2795960"/>
+            <a:ext cx="10454335" cy="2500000"/>
           </a:xfrm>
           <a:prstGeom prst="rect">
             <a:avLst/>
@@ -6359,14 +6383,14 @@
           <a:ln/>
         </p:spPr>
         <p:txBody>
-          <a:bodyPr wrap="square" lIns="0" tIns="0" rIns="0" bIns="0" rtlCol="0" anchor="t"/>
+          <a:bodyPr wrap="square" lIns="0" tIns="0" rIns="0" bIns="0" rtlCol="0" anchor="ctr"/>
           <a:lstStyle/>
           <a:p>
             <a:pPr indent="0" marL="0">
               <a:buNone/>
             </a:pPr>
             <a:r>
-              <a:rPr lang="en-US" sz="1250" dirty="0">
+              <a:rPr lang="en-US" sz="2800" dirty="0">
                 <a:solidFill>
                   <a:srgbClr val="26262F"/>
                 </a:solidFill>
@@ -6376,7 +6400,7 @@
               </a:rPr>
               <a:t>When a chain gets long, put each method call on its own line. It reads like a numbered list of steps, and makes it much easier to see which step introduced a bug.</a:t>
             </a:r>
-            <a:endParaRPr lang="en-US" sz="1250" dirty="0"/>
+            <a:endParaRPr lang="en-US" sz="2800" dirty="0"/>
           </a:p>
         </p:txBody>
       </p:sp>
@@ -6550,9 +6574,13 @@
             </a:avLst>
           </a:prstGeom>
           <a:solidFill>
-            <a:srgbClr val="1E1E4C"/>
+            <a:srgbClr val="F7F8F9"/>
           </a:solidFill>
-          <a:ln/>
+          <a:ln w="9525">
+            <a:solidFill>
+              <a:srgbClr val="D0D5DD"/>
+            </a:solidFill>
+          </a:ln>
         </p:spPr>
         <p:txBody>
           <a:bodyPr/>
@@ -6589,7 +6617,7 @@
             <a:r>
               <a:rPr lang="en-US" sz="1184" dirty="0">
                 <a:solidFill>
-                  <a:srgbClr val="C9D3F5"/>
+                  <a:srgbClr val="1F2429"/>
                 </a:solidFill>
                 <a:latin typeface="Courier New" pitchFamily="34" charset="0"/>
                 <a:ea typeface="Courier New" pitchFamily="34" charset="-122"/>
@@ -6609,7 +6637,7 @@
             <a:r>
               <a:rPr lang="en-US" sz="1184" dirty="0">
                 <a:solidFill>
-                  <a:srgbClr val="C9D3F5"/>
+                  <a:srgbClr val="1F2429"/>
                 </a:solidFill>
                 <a:latin typeface="Courier New" pitchFamily="34" charset="0"/>
                 <a:ea typeface="Courier New" pitchFamily="34" charset="-122"/>
@@ -6629,7 +6657,7 @@
             <a:r>
               <a:rPr lang="en-US" sz="1184" dirty="0">
                 <a:solidFill>
-                  <a:srgbClr val="C9D3F5"/>
+                  <a:srgbClr val="1F2429"/>
                 </a:solidFill>
                 <a:latin typeface="Courier New" pitchFamily="34" charset="0"/>
                 <a:ea typeface="Courier New" pitchFamily="34" charset="-122"/>
@@ -6649,7 +6677,7 @@
             <a:r>
               <a:rPr lang="en-US" sz="1184" dirty="0">
                 <a:solidFill>
-                  <a:srgbClr val="C9D3F5"/>
+                  <a:srgbClr val="1F2429"/>
                 </a:solidFill>
                 <a:latin typeface="Courier New" pitchFamily="34" charset="0"/>
                 <a:ea typeface="Courier New" pitchFamily="34" charset="-122"/>
@@ -6669,7 +6697,7 @@
             <a:r>
               <a:rPr lang="en-US" sz="1184" dirty="0">
                 <a:solidFill>
-                  <a:srgbClr val="C9D3F5"/>
+                  <a:srgbClr val="1F2429"/>
                 </a:solidFill>
                 <a:latin typeface="Courier New" pitchFamily="34" charset="0"/>
                 <a:ea typeface="Courier New" pitchFamily="34" charset="-122"/>
@@ -6698,7 +6726,7 @@
             <a:r>
               <a:rPr lang="en-US" sz="1184" dirty="0">
                 <a:solidFill>
-                  <a:srgbClr val="C9D3F5"/>
+                  <a:srgbClr val="1F2429"/>
                 </a:solidFill>
                 <a:latin typeface="Courier New" pitchFamily="34" charset="0"/>
                 <a:ea typeface="Courier New" pitchFamily="34" charset="-122"/>
@@ -6718,7 +6746,7 @@
             <a:r>
               <a:rPr lang="en-US" sz="1184" dirty="0">
                 <a:solidFill>
-                  <a:srgbClr val="C9D3F5"/>
+                  <a:srgbClr val="1F2429"/>
                 </a:solidFill>
                 <a:latin typeface="Courier New" pitchFamily="34" charset="0"/>
                 <a:ea typeface="Courier New" pitchFamily="34" charset="-122"/>
@@ -6738,7 +6766,7 @@
             <a:r>
               <a:rPr lang="en-US" sz="1184" dirty="0">
                 <a:solidFill>
-                  <a:srgbClr val="C9D3F5"/>
+                  <a:srgbClr val="1F2429"/>
                 </a:solidFill>
                 <a:latin typeface="Courier New" pitchFamily="34" charset="0"/>
                 <a:ea typeface="Courier New" pitchFamily="34" charset="-122"/>
@@ -6758,7 +6786,7 @@
             <a:r>
               <a:rPr lang="en-US" sz="1184" dirty="0">
                 <a:solidFill>
-                  <a:srgbClr val="C9D3F5"/>
+                  <a:srgbClr val="1F2429"/>
                 </a:solidFill>
                 <a:latin typeface="Courier New" pitchFamily="34" charset="0"/>
                 <a:ea typeface="Courier New" pitchFamily="34" charset="-122"/>
@@ -6787,7 +6815,7 @@
             <a:r>
               <a:rPr lang="en-US" sz="1184" dirty="0">
                 <a:solidFill>
-                  <a:srgbClr val="C9D3F5"/>
+                  <a:srgbClr val="1F2429"/>
                 </a:solidFill>
                 <a:latin typeface="Courier New" pitchFamily="34" charset="0"/>
                 <a:ea typeface="Courier New" pitchFamily="34" charset="-122"/>
@@ -6807,7 +6835,7 @@
             <a:r>
               <a:rPr lang="en-US" sz="1184" dirty="0">
                 <a:solidFill>
-                  <a:srgbClr val="C9D3F5"/>
+                  <a:srgbClr val="1F2429"/>
                 </a:solidFill>
                 <a:latin typeface="Courier New" pitchFamily="34" charset="0"/>
                 <a:ea typeface="Courier New" pitchFamily="34" charset="-122"/>
@@ -6827,7 +6855,7 @@
             <a:r>
               <a:rPr lang="en-US" sz="1184" dirty="0">
                 <a:solidFill>
-                  <a:srgbClr val="C9D3F5"/>
+                  <a:srgbClr val="1F2429"/>
                 </a:solidFill>
                 <a:latin typeface="Courier New" pitchFamily="34" charset="0"/>
                 <a:ea typeface="Courier New" pitchFamily="34" charset="-122"/>
@@ -6847,7 +6875,7 @@
             <a:r>
               <a:rPr lang="en-US" sz="1184" dirty="0">
                 <a:solidFill>
-                  <a:srgbClr val="C9D3F5"/>
+                  <a:srgbClr val="1F2429"/>
                 </a:solidFill>
                 <a:latin typeface="Courier New" pitchFamily="34" charset="0"/>
                 <a:ea typeface="Courier New" pitchFamily="34" charset="-122"/>
@@ -7794,9 +7822,13 @@
             </a:avLst>
           </a:prstGeom>
           <a:solidFill>
-            <a:srgbClr val="1E1E4C"/>
+            <a:srgbClr val="F7F8F9"/>
           </a:solidFill>
-          <a:ln/>
+          <a:ln w="9525">
+            <a:solidFill>
+              <a:srgbClr val="D0D5DD"/>
+            </a:solidFill>
+          </a:ln>
         </p:spPr>
         <p:txBody>
           <a:bodyPr/>
@@ -7833,7 +7865,7 @@
             <a:r>
               <a:rPr lang="en-US" sz="1400" dirty="0">
                 <a:solidFill>
-                  <a:srgbClr val="C9D3F5"/>
+                  <a:srgbClr val="1F2429"/>
                 </a:solidFill>
                 <a:latin typeface="Courier New" pitchFamily="34" charset="0"/>
                 <a:ea typeface="Courier New" pitchFamily="34" charset="-122"/>
@@ -7853,7 +7885,7 @@
             <a:r>
               <a:rPr lang="en-US" sz="1400" dirty="0">
                 <a:solidFill>
-                  <a:srgbClr val="C9D3F5"/>
+                  <a:srgbClr val="1F2429"/>
                 </a:solidFill>
                 <a:latin typeface="Courier New" pitchFamily="34" charset="0"/>
                 <a:ea typeface="Courier New" pitchFamily="34" charset="-122"/>
@@ -8848,9 +8880,13 @@
             </a:avLst>
           </a:prstGeom>
           <a:solidFill>
-            <a:srgbClr val="1E1E4C"/>
+            <a:srgbClr val="F7F8F9"/>
           </a:solidFill>
-          <a:ln/>
+          <a:ln w="9525">
+            <a:solidFill>
+              <a:srgbClr val="D0D5DD"/>
+            </a:solidFill>
+          </a:ln>
         </p:spPr>
         <p:txBody>
           <a:bodyPr/>
@@ -8887,7 +8923,7 @@
             <a:r>
               <a:rPr lang="en-US" sz="1400" dirty="0">
                 <a:solidFill>
-                  <a:srgbClr val="C9D3F5"/>
+                  <a:srgbClr val="1F2429"/>
                 </a:solidFill>
                 <a:latin typeface="Courier New" pitchFamily="34" charset="0"/>
                 <a:ea typeface="Courier New" pitchFamily="34" charset="-122"/>
@@ -8907,7 +8943,7 @@
             <a:r>
               <a:rPr lang="en-US" sz="1400" dirty="0">
                 <a:solidFill>
-                  <a:srgbClr val="C9D3F5"/>
+                  <a:srgbClr val="1F2429"/>
                 </a:solidFill>
                 <a:latin typeface="Courier New" pitchFamily="34" charset="0"/>
                 <a:ea typeface="Courier New" pitchFamily="34" charset="-122"/>
@@ -8936,7 +8972,7 @@
             <a:r>
               <a:rPr lang="en-US" sz="1400" dirty="0">
                 <a:solidFill>
-                  <a:srgbClr val="C9D3F5"/>
+                  <a:srgbClr val="1F2429"/>
                 </a:solidFill>
                 <a:latin typeface="Courier New" pitchFamily="34" charset="0"/>
                 <a:ea typeface="Courier New" pitchFamily="34" charset="-122"/>
@@ -8956,7 +8992,7 @@
             <a:r>
               <a:rPr lang="en-US" sz="1400" dirty="0">
                 <a:solidFill>
-                  <a:srgbClr val="C9D3F5"/>
+                  <a:srgbClr val="1F2429"/>
                 </a:solidFill>
                 <a:latin typeface="Courier New" pitchFamily="34" charset="0"/>
                 <a:ea typeface="Courier New" pitchFamily="34" charset="-122"/>
@@ -8976,7 +9012,7 @@
             <a:r>
               <a:rPr lang="en-US" sz="1400" dirty="0">
                 <a:solidFill>
-                  <a:srgbClr val="C9D3F5"/>
+                  <a:srgbClr val="1F2429"/>
                 </a:solidFill>
                 <a:latin typeface="Courier New" pitchFamily="34" charset="0"/>
                 <a:ea typeface="Courier New" pitchFamily="34" charset="-122"/>
@@ -8996,7 +9032,7 @@
             <a:r>
               <a:rPr lang="en-US" sz="1400" dirty="0">
                 <a:solidFill>
-                  <a:srgbClr val="C9D3F5"/>
+                  <a:srgbClr val="1F2429"/>
                 </a:solidFill>
                 <a:latin typeface="Courier New" pitchFamily="34" charset="0"/>
                 <a:ea typeface="Courier New" pitchFamily="34" charset="-122"/>
@@ -9025,7 +9061,7 @@
             <a:r>
               <a:rPr lang="en-US" sz="1400" dirty="0">
                 <a:solidFill>
-                  <a:srgbClr val="C9D3F5"/>
+                  <a:srgbClr val="1F2429"/>
                 </a:solidFill>
                 <a:latin typeface="Courier New" pitchFamily="34" charset="0"/>
                 <a:ea typeface="Courier New" pitchFamily="34" charset="-122"/>
@@ -9045,7 +9081,7 @@
             <a:r>
               <a:rPr lang="en-US" sz="1400" dirty="0">
                 <a:solidFill>
-                  <a:srgbClr val="C9D3F5"/>
+                  <a:srgbClr val="1F2429"/>
                 </a:solidFill>
                 <a:latin typeface="Courier New" pitchFamily="34" charset="0"/>
                 <a:ea typeface="Courier New" pitchFamily="34" charset="-122"/>
@@ -9065,7 +9101,7 @@
             <a:r>
               <a:rPr lang="en-US" sz="1400" dirty="0">
                 <a:solidFill>
-                  <a:srgbClr val="C9D3F5"/>
+                  <a:srgbClr val="1F2429"/>
                 </a:solidFill>
                 <a:latin typeface="Courier New" pitchFamily="34" charset="0"/>
                 <a:ea typeface="Courier New" pitchFamily="34" charset="-122"/>
@@ -10114,9 +10150,13 @@
             </a:avLst>
           </a:prstGeom>
           <a:solidFill>
-            <a:srgbClr val="1E1E4C"/>
+            <a:srgbClr val="F7F8F9"/>
           </a:solidFill>
-          <a:ln/>
+          <a:ln w="9525">
+            <a:solidFill>
+              <a:srgbClr val="D0D5DD"/>
+            </a:solidFill>
+          </a:ln>
         </p:spPr>
         <p:txBody>
           <a:bodyPr/>
@@ -10153,7 +10193,7 @@
             <a:r>
               <a:rPr lang="en-US" sz="1400" dirty="0">
                 <a:solidFill>
-                  <a:srgbClr val="C9D3F5"/>
+                  <a:srgbClr val="1F2429"/>
                 </a:solidFill>
                 <a:latin typeface="Courier New" pitchFamily="34" charset="0"/>
                 <a:ea typeface="Courier New" pitchFamily="34" charset="-122"/>
@@ -10182,7 +10222,7 @@
             <a:r>
               <a:rPr lang="en-US" sz="1400" dirty="0">
                 <a:solidFill>
-                  <a:srgbClr val="C9D3F5"/>
+                  <a:srgbClr val="1F2429"/>
                 </a:solidFill>
                 <a:latin typeface="Courier New" pitchFamily="34" charset="0"/>
                 <a:ea typeface="Courier New" pitchFamily="34" charset="-122"/>
@@ -10202,7 +10242,7 @@
             <a:r>
               <a:rPr lang="en-US" sz="1400" dirty="0">
                 <a:solidFill>
-                  <a:srgbClr val="C9D3F5"/>
+                  <a:srgbClr val="1F2429"/>
                 </a:solidFill>
                 <a:latin typeface="Courier New" pitchFamily="34" charset="0"/>
                 <a:ea typeface="Courier New" pitchFamily="34" charset="-122"/>
@@ -10222,7 +10262,7 @@
             <a:r>
               <a:rPr lang="en-US" sz="1400" dirty="0">
                 <a:solidFill>
-                  <a:srgbClr val="C9D3F5"/>
+                  <a:srgbClr val="1F2429"/>
                 </a:solidFill>
                 <a:latin typeface="Courier New" pitchFamily="34" charset="0"/>
                 <a:ea typeface="Courier New" pitchFamily="34" charset="-122"/>
@@ -10242,7 +10282,7 @@
             <a:r>
               <a:rPr lang="en-US" sz="1400" dirty="0">
                 <a:solidFill>
-                  <a:srgbClr val="C9D3F5"/>
+                  <a:srgbClr val="1F2429"/>
                 </a:solidFill>
                 <a:latin typeface="Courier New" pitchFamily="34" charset="0"/>
                 <a:ea typeface="Courier New" pitchFamily="34" charset="-122"/>
@@ -10262,7 +10302,7 @@
             <a:r>
               <a:rPr lang="en-US" sz="1400" dirty="0">
                 <a:solidFill>
-                  <a:srgbClr val="C9D3F5"/>
+                  <a:srgbClr val="1F2429"/>
                 </a:solidFill>
                 <a:latin typeface="Courier New" pitchFamily="34" charset="0"/>
                 <a:ea typeface="Courier New" pitchFamily="34" charset="-122"/>
@@ -10282,7 +10322,7 @@
             <a:r>
               <a:rPr lang="en-US" sz="1400" dirty="0">
                 <a:solidFill>
-                  <a:srgbClr val="C9D3F5"/>
+                  <a:srgbClr val="1F2429"/>
                 </a:solidFill>
                 <a:latin typeface="Courier New" pitchFamily="34" charset="0"/>
                 <a:ea typeface="Courier New" pitchFamily="34" charset="-122"/>
@@ -10503,9 +10543,13 @@
             </a:avLst>
           </a:prstGeom>
           <a:solidFill>
-            <a:srgbClr val="1E1E4C"/>
+            <a:srgbClr val="F7F8F9"/>
           </a:solidFill>
-          <a:ln/>
+          <a:ln w="9525">
+            <a:solidFill>
+              <a:srgbClr val="D0D5DD"/>
+            </a:solidFill>
+          </a:ln>
         </p:spPr>
         <p:txBody>
           <a:bodyPr/>
@@ -10542,7 +10586,7 @@
             <a:r>
               <a:rPr lang="en-US" sz="1400" dirty="0">
                 <a:solidFill>
-                  <a:srgbClr val="C9D3F5"/>
+                  <a:srgbClr val="1F2429"/>
                 </a:solidFill>
                 <a:latin typeface="Courier New" pitchFamily="34" charset="0"/>
                 <a:ea typeface="Courier New" pitchFamily="34" charset="-122"/>
@@ -10562,7 +10606,7 @@
             <a:r>
               <a:rPr lang="en-US" sz="1400" dirty="0">
                 <a:solidFill>
-                  <a:srgbClr val="C9D3F5"/>
+                  <a:srgbClr val="1F2429"/>
                 </a:solidFill>
                 <a:latin typeface="Courier New" pitchFamily="34" charset="0"/>
                 <a:ea typeface="Courier New" pitchFamily="34" charset="-122"/>
@@ -10582,7 +10626,7 @@
             <a:r>
               <a:rPr lang="en-US" sz="1400" dirty="0">
                 <a:solidFill>
-                  <a:srgbClr val="C9D3F5"/>
+                  <a:srgbClr val="1F2429"/>
                 </a:solidFill>
                 <a:latin typeface="Courier New" pitchFamily="34" charset="0"/>
                 <a:ea typeface="Courier New" pitchFamily="34" charset="-122"/>
@@ -10602,7 +10646,7 @@
             <a:r>
               <a:rPr lang="en-US" sz="1400" dirty="0">
                 <a:solidFill>
-                  <a:srgbClr val="C9D3F5"/>
+                  <a:srgbClr val="1F2429"/>
                 </a:solidFill>
                 <a:latin typeface="Courier New" pitchFamily="34" charset="0"/>
                 <a:ea typeface="Courier New" pitchFamily="34" charset="-122"/>
@@ -10815,7 +10859,7 @@
         <p:spPr>
           <a:xfrm>
             <a:off x="640080" y="1965960"/>
-            <a:ext cx="10911535" cy="1554480"/>
+            <a:ext cx="10911535" cy="3657600"/>
           </a:xfrm>
           <a:prstGeom prst="roundRect">
             <a:avLst>
@@ -10846,7 +10890,7 @@
         <p:spPr>
           <a:xfrm>
             <a:off x="868680" y="2103120"/>
-            <a:ext cx="10454335" cy="274320"/>
+            <a:ext cx="10454335" cy="400000"/>
           </a:xfrm>
           <a:prstGeom prst="rect">
             <a:avLst/>
@@ -10862,7 +10906,7 @@
               <a:buNone/>
             </a:pPr>
             <a:r>
-              <a:rPr lang="en-US" sz="1000" b="1" spc="200" kern="0" dirty="0">
+              <a:rPr lang="en-US" sz="1800" b="1" spc="200" kern="0" dirty="0">
                 <a:solidFill>
                   <a:srgbClr val="33459E"/>
                 </a:solidFill>
@@ -10872,7 +10916,7 @@
               </a:rPr>
               <a:t>NOTE</a:t>
             </a:r>
-            <a:endParaRPr lang="en-US" sz="1000" dirty="0"/>
+            <a:endParaRPr lang="en-US" sz="1800" dirty="0"/>
           </a:p>
         </p:txBody>
       </p:sp>
@@ -10884,8 +10928,8 @@
         </p:nvSpPr>
         <p:spPr>
           <a:xfrm>
-            <a:off x="868680" y="2404872"/>
-            <a:ext cx="10454335" cy="960120"/>
+            <a:off x="868680" y="2795960"/>
+            <a:ext cx="10454335" cy="2500000"/>
           </a:xfrm>
           <a:prstGeom prst="rect">
             <a:avLst/>
@@ -10894,14 +10938,14 @@
           <a:ln/>
         </p:spPr>
         <p:txBody>
-          <a:bodyPr wrap="square" lIns="0" tIns="0" rIns="0" bIns="0" rtlCol="0" anchor="t"/>
+          <a:bodyPr wrap="square" lIns="0" tIns="0" rIns="0" bIns="0" rtlCol="0" anchor="ctr"/>
           <a:lstStyle/>
           <a:p>
             <a:pPr indent="0" marL="0">
               <a:buNone/>
             </a:pPr>
             <a:r>
-              <a:rPr lang="en-US" sz="1250" dirty="0">
+              <a:rPr lang="en-US" sz="2800" dirty="0">
                 <a:solidFill>
                   <a:srgbClr val="26262F"/>
                 </a:solidFill>
@@ -10911,7 +10955,7 @@
               </a:rPr>
               <a:t>for...in iterates over an object's KEYS (or an array's indexes) and is generally used for plain objects. for...of iterates over VALUES and is generally preferred for arrays. Mixing them up is a common source of bugs.</a:t>
             </a:r>
-            <a:endParaRPr lang="en-US" sz="1250" dirty="0"/>
+            <a:endParaRPr lang="en-US" sz="2800" dirty="0"/>
           </a:p>
         </p:txBody>
       </p:sp>
@@ -11085,9 +11129,13 @@
             </a:avLst>
           </a:prstGeom>
           <a:solidFill>
-            <a:srgbClr val="1E1E4C"/>
+            <a:srgbClr val="F7F8F9"/>
           </a:solidFill>
-          <a:ln/>
+          <a:ln w="9525">
+            <a:solidFill>
+              <a:srgbClr val="D0D5DD"/>
+            </a:solidFill>
+          </a:ln>
         </p:spPr>
         <p:txBody>
           <a:bodyPr/>
@@ -11124,7 +11172,7 @@
             <a:r>
               <a:rPr lang="en-US" sz="1400" dirty="0">
                 <a:solidFill>
-                  <a:srgbClr val="C9D3F5"/>
+                  <a:srgbClr val="1F2429"/>
                 </a:solidFill>
                 <a:latin typeface="Courier New" pitchFamily="34" charset="0"/>
                 <a:ea typeface="Courier New" pitchFamily="34" charset="-122"/>
@@ -11144,7 +11192,7 @@
             <a:r>
               <a:rPr lang="en-US" sz="1400" dirty="0">
                 <a:solidFill>
-                  <a:srgbClr val="C9D3F5"/>
+                  <a:srgbClr val="1F2429"/>
                 </a:solidFill>
                 <a:latin typeface="Courier New" pitchFamily="34" charset="0"/>
                 <a:ea typeface="Courier New" pitchFamily="34" charset="-122"/>
@@ -11164,7 +11212,7 @@
             <a:r>
               <a:rPr lang="en-US" sz="1400" dirty="0">
                 <a:solidFill>
-                  <a:srgbClr val="C9D3F5"/>
+                  <a:srgbClr val="1F2429"/>
                 </a:solidFill>
                 <a:latin typeface="Courier New" pitchFamily="34" charset="0"/>
                 <a:ea typeface="Courier New" pitchFamily="34" charset="-122"/>
@@ -11184,7 +11232,7 @@
             <a:r>
               <a:rPr lang="en-US" sz="1400" dirty="0">
                 <a:solidFill>
-                  <a:srgbClr val="C9D3F5"/>
+                  <a:srgbClr val="1F2429"/>
                 </a:solidFill>
                 <a:latin typeface="Courier New" pitchFamily="34" charset="0"/>
                 <a:ea typeface="Courier New" pitchFamily="34" charset="-122"/>
@@ -11405,9 +11453,13 @@
             </a:avLst>
           </a:prstGeom>
           <a:solidFill>
-            <a:srgbClr val="1E1E4C"/>
+            <a:srgbClr val="F7F8F9"/>
           </a:solidFill>
-          <a:ln/>
+          <a:ln w="9525">
+            <a:solidFill>
+              <a:srgbClr val="D0D5DD"/>
+            </a:solidFill>
+          </a:ln>
         </p:spPr>
         <p:txBody>
           <a:bodyPr/>
@@ -11444,7 +11496,7 @@
             <a:r>
               <a:rPr lang="en-US" sz="1400" dirty="0">
                 <a:solidFill>
-                  <a:srgbClr val="C9D3F5"/>
+                  <a:srgbClr val="1F2429"/>
                 </a:solidFill>
                 <a:latin typeface="Courier New" pitchFamily="34" charset="0"/>
                 <a:ea typeface="Courier New" pitchFamily="34" charset="-122"/>
@@ -11464,7 +11516,7 @@
             <a:r>
               <a:rPr lang="en-US" sz="1400" dirty="0">
                 <a:solidFill>
-                  <a:srgbClr val="C9D3F5"/>
+                  <a:srgbClr val="1F2429"/>
                 </a:solidFill>
                 <a:latin typeface="Courier New" pitchFamily="34" charset="0"/>
                 <a:ea typeface="Courier New" pitchFamily="34" charset="-122"/>
@@ -11484,7 +11536,7 @@
             <a:r>
               <a:rPr lang="en-US" sz="1400" dirty="0">
                 <a:solidFill>
-                  <a:srgbClr val="C9D3F5"/>
+                  <a:srgbClr val="1F2429"/>
                 </a:solidFill>
                 <a:latin typeface="Courier New" pitchFamily="34" charset="0"/>
                 <a:ea typeface="Courier New" pitchFamily="34" charset="-122"/>
@@ -11705,9 +11757,13 @@
             </a:avLst>
           </a:prstGeom>
           <a:solidFill>
-            <a:srgbClr val="1E1E4C"/>
+            <a:srgbClr val="F7F8F9"/>
           </a:solidFill>
-          <a:ln/>
+          <a:ln w="9525">
+            <a:solidFill>
+              <a:srgbClr val="D0D5DD"/>
+            </a:solidFill>
+          </a:ln>
         </p:spPr>
         <p:txBody>
           <a:bodyPr/>
@@ -11744,7 +11800,7 @@
             <a:r>
               <a:rPr lang="en-US" sz="1400" dirty="0">
                 <a:solidFill>
-                  <a:srgbClr val="C9D3F5"/>
+                  <a:srgbClr val="1F2429"/>
                 </a:solidFill>
                 <a:latin typeface="Courier New" pitchFamily="34" charset="0"/>
                 <a:ea typeface="Courier New" pitchFamily="34" charset="-122"/>
@@ -11764,7 +11820,7 @@
             <a:r>
               <a:rPr lang="en-US" sz="1400" dirty="0">
                 <a:solidFill>
-                  <a:srgbClr val="C9D3F5"/>
+                  <a:srgbClr val="1F2429"/>
                 </a:solidFill>
                 <a:latin typeface="Courier New" pitchFamily="34" charset="0"/>
                 <a:ea typeface="Courier New" pitchFamily="34" charset="-122"/>
@@ -11784,7 +11840,7 @@
             <a:r>
               <a:rPr lang="en-US" sz="1400" dirty="0">
                 <a:solidFill>
-                  <a:srgbClr val="C9D3F5"/>
+                  <a:srgbClr val="1F2429"/>
                 </a:solidFill>
                 <a:latin typeface="Courier New" pitchFamily="34" charset="0"/>
                 <a:ea typeface="Courier New" pitchFamily="34" charset="-122"/>
